--- a/Seizure_Prediction.pptx
+++ b/Seizure_Prediction.pptx
@@ -4,6 +4,9 @@
   <p:sldMasterIdLst>
     <p:sldMasterId id="2147483648" r:id="rId1"/>
   </p:sldMasterIdLst>
+  <p:notesMasterIdLst>
+    <p:notesMasterId r:id="rId13"/>
+  </p:notesMasterIdLst>
   <p:sldIdLst>
     <p:sldId id="256" r:id="rId2"/>
     <p:sldId id="257" r:id="rId3"/>
@@ -17,9 +20,6 @@
     <p:sldId id="265" r:id="rId11"/>
     <p:sldId id="266" r:id="rId12"/>
   </p:sldIdLst>
-  <p:notesMasterIdLst>
-    <p:notesMasterId r:id="rId13"/>
-  </p:notesMasterIdLst>
   <p:sldSz cx="12192000" cy="6858000"/>
   <p:notesSz cx="6858000" cy="12192000"/>
   <p:defaultTextStyle>
@@ -114,13 +114,20 @@
       </a:defRPr>
     </a:lvl9pPr>
   </p:defaultTextStyle>
+  <p:extLst>
+    <p:ext uri="{EFAFB233-063F-42B5-8137-9DF3F51BA10A}">
+      <p15:sldGuideLst xmlns:p15="http://schemas.microsoft.com/office/powerpoint/2012/main"/>
+    </p:ext>
+  </p:extLst>
 </p:presentation>
 </file>
 
 <file path=ppt/charts/chart1.xml><?xml version="1.0" encoding="utf-8"?>
-<c:chartSpace xmlns:c="http://schemas.openxmlformats.org/drawingml/2006/chart" xmlns:a="http://schemas.openxmlformats.org/drawingml/2006/main" xmlns:r="http://schemas.openxmlformats.org/officeDocument/2006/relationships">
+<c:chartSpace xmlns:c="http://schemas.openxmlformats.org/drawingml/2006/chart" xmlns:a="http://schemas.openxmlformats.org/drawingml/2006/main" xmlns:r="http://schemas.openxmlformats.org/officeDocument/2006/relationships" xmlns:c16r2="http://schemas.microsoft.com/office/drawing/2015/06/chart">
   <c:date1904 val="0"/>
+  <c:lang val="en-US"/>
   <c:roundedCorners val="1"/>
+  <c:style val="2"/>
   <c:chart>
     <c:title>
       <c:tx>
@@ -148,7 +155,6 @@
           </a:p>
         </c:rich>
       </c:tx>
-      <c:layout/>
       <c:overlay val="0"/>
     </c:title>
     <c:autoTitleDeleted val="0"/>
@@ -181,18 +187,26 @@
           <c:invertIfNegative val="0"/>
           <c:dLbls>
             <c:numFmt formatCode="0.00" sourceLinked="0"/>
+            <c:spPr>
+              <a:noFill/>
+              <a:ln>
+                <a:noFill/>
+              </a:ln>
+              <a:effectLst/>
+            </c:spPr>
             <c:txPr>
               <a:bodyPr/>
               <a:lstStyle/>
               <a:p>
                 <a:pPr>
-                  <a:defRPr b="0" i="0" strike="noStrike" sz="1000" u="none">
+                  <a:defRPr sz="1000" b="0" i="0" u="none" strike="noStrike">
                     <a:solidFill>
                       <a:srgbClr val="21295C"/>
                     </a:solidFill>
                     <a:latin typeface="Arial"/>
                   </a:defRPr>
                 </a:pPr>
+                <a:endParaRPr lang="en-US"/>
               </a:p>
             </c:txPr>
             <c:showLegendKey val="0"/>
@@ -202,25 +216,28 @@
             <c:showPercent val="0"/>
             <c:showBubbleSize val="0"/>
             <c:showLeaderLines val="0"/>
+            <c:extLst>
+              <c:ext xmlns:c15="http://schemas.microsoft.com/office/drawing/2012/chart" uri="{CE6537A1-D6FC-4f65-9D91-7224C49458BB}">
+                <c15:showLeaderLines val="0"/>
+              </c:ext>
+            </c:extLst>
           </c:dLbls>
           <c:cat>
-            <c:multiLvlStrRef>
+            <c:strRef>
               <c:f>Sheet1!$A$2:$A$4</c:f>
-              <c:multiLvlStrCache>
+              <c:strCache>
                 <c:ptCount val="3"/>
-                <c:lvl>
-                  <c:pt idx="0">
-                    <c:v>D1 Raw</c:v>
-                  </c:pt>
-                  <c:pt idx="1">
-                    <c:v>D2 Stat</c:v>
-                  </c:pt>
-                  <c:pt idx="2">
-                    <c:v>D3 Freq</c:v>
-                  </c:pt>
-                </c:lvl>
-              </c:multiLvlStrCache>
-            </c:multiLvlStrRef>
+                <c:pt idx="0">
+                  <c:v>D1 Raw</c:v>
+                </c:pt>
+                <c:pt idx="1">
+                  <c:v>D2 Stat</c:v>
+                </c:pt>
+                <c:pt idx="2">
+                  <c:v>D3 Freq</c:v>
+                </c:pt>
+              </c:strCache>
+            </c:strRef>
           </c:cat>
           <c:val>
             <c:numRef>
@@ -229,17 +246,22 @@
                 <c:formatCode>General</c:formatCode>
                 <c:ptCount val="3"/>
                 <c:pt idx="0">
-                  <c:v>0.825</c:v>
+                  <c:v>0.82499999999999996</c:v>
                 </c:pt>
                 <c:pt idx="1">
-                  <c:v>0.914</c:v>
+                  <c:v>0.91400000000000003</c:v>
                 </c:pt>
                 <c:pt idx="2">
-                  <c:v>0.981</c:v>
+                  <c:v>0.98099999999999998</c:v>
                 </c:pt>
               </c:numCache>
             </c:numRef>
           </c:val>
+          <c:extLst>
+            <c:ext xmlns:c16="http://schemas.microsoft.com/office/drawing/2014/chart" uri="{C3380CC4-5D6E-409C-BE32-E72D297353CC}">
+              <c16:uniqueId val="{00000000-8902-403C-ABE7-984BC14C1ED7}"/>
+            </c:ext>
+          </c:extLst>
         </c:ser>
         <c:ser>
           <c:idx val="1"/>
@@ -264,18 +286,26 @@
           <c:invertIfNegative val="0"/>
           <c:dLbls>
             <c:numFmt formatCode="0.00" sourceLinked="0"/>
+            <c:spPr>
+              <a:noFill/>
+              <a:ln>
+                <a:noFill/>
+              </a:ln>
+              <a:effectLst/>
+            </c:spPr>
             <c:txPr>
               <a:bodyPr/>
               <a:lstStyle/>
               <a:p>
                 <a:pPr>
-                  <a:defRPr b="0" i="0" strike="noStrike" sz="1000" u="none">
+                  <a:defRPr sz="1000" b="0" i="0" u="none" strike="noStrike">
                     <a:solidFill>
                       <a:srgbClr val="21295C"/>
                     </a:solidFill>
                     <a:latin typeface="Arial"/>
                   </a:defRPr>
                 </a:pPr>
+                <a:endParaRPr lang="en-US"/>
               </a:p>
             </c:txPr>
             <c:showLegendKey val="0"/>
@@ -285,25 +315,28 @@
             <c:showPercent val="0"/>
             <c:showBubbleSize val="0"/>
             <c:showLeaderLines val="0"/>
+            <c:extLst>
+              <c:ext xmlns:c15="http://schemas.microsoft.com/office/drawing/2012/chart" uri="{CE6537A1-D6FC-4f65-9D91-7224C49458BB}">
+                <c15:showLeaderLines val="0"/>
+              </c:ext>
+            </c:extLst>
           </c:dLbls>
           <c:cat>
-            <c:multiLvlStrRef>
+            <c:strRef>
               <c:f>Sheet1!$A$2:$A$4</c:f>
-              <c:multiLvlStrCache>
+              <c:strCache>
                 <c:ptCount val="3"/>
-                <c:lvl>
-                  <c:pt idx="0">
-                    <c:v>D1 Raw</c:v>
-                  </c:pt>
-                  <c:pt idx="1">
-                    <c:v>D2 Stat</c:v>
-                  </c:pt>
-                  <c:pt idx="2">
-                    <c:v>D3 Freq</c:v>
-                  </c:pt>
-                </c:lvl>
-              </c:multiLvlStrCache>
-            </c:multiLvlStrRef>
+                <c:pt idx="0">
+                  <c:v>D1 Raw</c:v>
+                </c:pt>
+                <c:pt idx="1">
+                  <c:v>D2 Stat</c:v>
+                </c:pt>
+                <c:pt idx="2">
+                  <c:v>D3 Freq</c:v>
+                </c:pt>
+              </c:strCache>
+            </c:strRef>
           </c:cat>
           <c:val>
             <c:numRef>
@@ -312,10 +345,10 @@
                 <c:formatCode>General</c:formatCode>
                 <c:ptCount val="3"/>
                 <c:pt idx="0">
-                  <c:v>0.829</c:v>
+                  <c:v>0.82899999999999996</c:v>
                 </c:pt>
                 <c:pt idx="1">
-                  <c:v>0.909</c:v>
+                  <c:v>0.90900000000000003</c:v>
                 </c:pt>
                 <c:pt idx="2">
                   <c:v>0.997</c:v>
@@ -323,36 +356,23 @@
               </c:numCache>
             </c:numRef>
           </c:val>
+          <c:extLst>
+            <c:ext xmlns:c16="http://schemas.microsoft.com/office/drawing/2014/chart" uri="{C3380CC4-5D6E-409C-BE32-E72D297353CC}">
+              <c16:uniqueId val="{00000001-8902-403C-ABE7-984BC14C1ED7}"/>
+            </c:ext>
+          </c:extLst>
         </c:ser>
         <c:dLbls>
-          <c:numFmt formatCode="0.00" sourceLinked="0"/>
-          <c:txPr>
-            <a:bodyPr/>
-            <a:lstStyle/>
-            <a:p>
-              <a:pPr>
-                <a:defRPr b="0" i="0" strike="noStrike" sz="1000" u="none">
-                  <a:solidFill>
-                    <a:srgbClr val="21295C"/>
-                  </a:solidFill>
-                  <a:latin typeface="Arial"/>
-                </a:defRPr>
-              </a:pPr>
-            </a:p>
-          </c:txPr>
           <c:showLegendKey val="0"/>
           <c:showVal val="1"/>
           <c:showCatName val="0"/>
           <c:showSerName val="0"/>
           <c:showPercent val="0"/>
           <c:showBubbleSize val="0"/>
-          <c:showLeaderLines val="0"/>
         </c:dLbls>
         <c:gapWidth val="150"/>
-        <c:overlap val="0"/>
         <c:axId val="2094734554"/>
         <c:axId val="2094734552"/>
-        <c:axId val="2094734556"/>
       </c:barChart>
       <c:catAx>
         <c:axId val="2094734554"/>
@@ -393,6 +413,7 @@
         <c:crosses val="autoZero"/>
         <c:auto val="1"/>
         <c:lblAlgn val="ctr"/>
+        <c:lblOffset val="100"/>
         <c:noMultiLvlLbl val="1"/>
       </c:catAx>
       <c:valAx>
@@ -475,6 +496,7 @@
     </c:legend>
     <c:plotVisOnly val="1"/>
     <c:dispBlanksAs val="span"/>
+    <c:showDLblsOverMax val="1"/>
   </c:chart>
   <c:spPr>
     <a:noFill/>
@@ -490,9 +512,11 @@
 </file>
 
 <file path=ppt/charts/chart2.xml><?xml version="1.0" encoding="utf-8"?>
-<c:chartSpace xmlns:c="http://schemas.openxmlformats.org/drawingml/2006/chart" xmlns:a="http://schemas.openxmlformats.org/drawingml/2006/main" xmlns:r="http://schemas.openxmlformats.org/officeDocument/2006/relationships">
+<c:chartSpace xmlns:c="http://schemas.openxmlformats.org/drawingml/2006/chart" xmlns:a="http://schemas.openxmlformats.org/drawingml/2006/main" xmlns:r="http://schemas.openxmlformats.org/officeDocument/2006/relationships" xmlns:c16r2="http://schemas.microsoft.com/office/drawing/2015/06/chart">
   <c:date1904 val="0"/>
+  <c:lang val="en-US"/>
   <c:roundedCorners val="1"/>
+  <c:style val="2"/>
   <c:chart>
     <c:title>
       <c:tx>
@@ -520,7 +544,6 @@
           </a:p>
         </c:rich>
       </c:tx>
-      <c:layout/>
       <c:overlay val="0"/>
     </c:title>
     <c:autoTitleDeleted val="0"/>
@@ -553,18 +576,26 @@
           <c:invertIfNegative val="0"/>
           <c:dLbls>
             <c:numFmt formatCode="#,##0" sourceLinked="0"/>
+            <c:spPr>
+              <a:noFill/>
+              <a:ln>
+                <a:noFill/>
+              </a:ln>
+              <a:effectLst/>
+            </c:spPr>
             <c:txPr>
               <a:bodyPr/>
               <a:lstStyle/>
               <a:p>
                 <a:pPr>
-                  <a:defRPr b="0" i="0" strike="noStrike" sz="1000" u="none">
+                  <a:defRPr sz="1000" b="0" i="0" u="none" strike="noStrike">
                     <a:solidFill>
                       <a:srgbClr val="21295C"/>
                     </a:solidFill>
                     <a:latin typeface="Arial"/>
                   </a:defRPr>
                 </a:pPr>
+                <a:endParaRPr lang="en-US"/>
               </a:p>
             </c:txPr>
             <c:showLegendKey val="0"/>
@@ -574,25 +605,28 @@
             <c:showPercent val="0"/>
             <c:showBubbleSize val="0"/>
             <c:showLeaderLines val="0"/>
+            <c:extLst>
+              <c:ext xmlns:c15="http://schemas.microsoft.com/office/drawing/2012/chart" uri="{CE6537A1-D6FC-4f65-9D91-7224C49458BB}">
+                <c15:showLeaderLines val="0"/>
+              </c:ext>
+            </c:extLst>
           </c:dLbls>
           <c:cat>
-            <c:multiLvlStrRef>
+            <c:strRef>
               <c:f>Sheet1!$A$2:$A$4</c:f>
-              <c:multiLvlStrCache>
+              <c:strCache>
                 <c:ptCount val="3"/>
-                <c:lvl>
-                  <c:pt idx="0">
-                    <c:v>D1 Raw</c:v>
-                  </c:pt>
-                  <c:pt idx="1">
-                    <c:v>D2 Stat</c:v>
-                  </c:pt>
-                  <c:pt idx="2">
-                    <c:v>D3 Freq</c:v>
-                  </c:pt>
-                </c:lvl>
-              </c:multiLvlStrCache>
-            </c:multiLvlStrRef>
+                <c:pt idx="0">
+                  <c:v>D1 Raw</c:v>
+                </c:pt>
+                <c:pt idx="1">
+                  <c:v>D2 Stat</c:v>
+                </c:pt>
+                <c:pt idx="2">
+                  <c:v>D3 Freq</c:v>
+                </c:pt>
+              </c:strCache>
+            </c:strRef>
           </c:cat>
           <c:val>
             <c:numRef>
@@ -607,11 +641,16 @@
                   <c:v>14.3</c:v>
                 </c:pt>
                 <c:pt idx="2">
-                  <c:v>33.3</c:v>
+                  <c:v>33.299999999999997</c:v>
                 </c:pt>
               </c:numCache>
             </c:numRef>
           </c:val>
+          <c:extLst>
+            <c:ext xmlns:c16="http://schemas.microsoft.com/office/drawing/2014/chart" uri="{C3380CC4-5D6E-409C-BE32-E72D297353CC}">
+              <c16:uniqueId val="{00000000-7ACB-420D-AE05-7F86BBA6393A}"/>
+            </c:ext>
+          </c:extLst>
         </c:ser>
         <c:ser>
           <c:idx val="1"/>
@@ -636,18 +675,26 @@
           <c:invertIfNegative val="0"/>
           <c:dLbls>
             <c:numFmt formatCode="#,##0" sourceLinked="0"/>
+            <c:spPr>
+              <a:noFill/>
+              <a:ln>
+                <a:noFill/>
+              </a:ln>
+              <a:effectLst/>
+            </c:spPr>
             <c:txPr>
               <a:bodyPr/>
               <a:lstStyle/>
               <a:p>
                 <a:pPr>
-                  <a:defRPr b="0" i="0" strike="noStrike" sz="1000" u="none">
+                  <a:defRPr sz="1000" b="0" i="0" u="none" strike="noStrike">
                     <a:solidFill>
                       <a:srgbClr val="21295C"/>
                     </a:solidFill>
                     <a:latin typeface="Arial"/>
                   </a:defRPr>
                 </a:pPr>
+                <a:endParaRPr lang="en-US"/>
               </a:p>
             </c:txPr>
             <c:showLegendKey val="0"/>
@@ -657,25 +704,28 @@
             <c:showPercent val="0"/>
             <c:showBubbleSize val="0"/>
             <c:showLeaderLines val="0"/>
+            <c:extLst>
+              <c:ext xmlns:c15="http://schemas.microsoft.com/office/drawing/2012/chart" uri="{CE6537A1-D6FC-4f65-9D91-7224C49458BB}">
+                <c15:showLeaderLines val="0"/>
+              </c:ext>
+            </c:extLst>
           </c:dLbls>
           <c:cat>
-            <c:multiLvlStrRef>
+            <c:strRef>
               <c:f>Sheet1!$A$2:$A$4</c:f>
-              <c:multiLvlStrCache>
+              <c:strCache>
                 <c:ptCount val="3"/>
-                <c:lvl>
-                  <c:pt idx="0">
-                    <c:v>D1 Raw</c:v>
-                  </c:pt>
-                  <c:pt idx="1">
-                    <c:v>D2 Stat</c:v>
-                  </c:pt>
-                  <c:pt idx="2">
-                    <c:v>D3 Freq</c:v>
-                  </c:pt>
-                </c:lvl>
-              </c:multiLvlStrCache>
-            </c:multiLvlStrRef>
+                <c:pt idx="0">
+                  <c:v>D1 Raw</c:v>
+                </c:pt>
+                <c:pt idx="1">
+                  <c:v>D2 Stat</c:v>
+                </c:pt>
+                <c:pt idx="2">
+                  <c:v>D3 Freq</c:v>
+                </c:pt>
+              </c:strCache>
+            </c:strRef>
           </c:cat>
           <c:val>
             <c:numRef>
@@ -695,6 +745,11 @@
               </c:numCache>
             </c:numRef>
           </c:val>
+          <c:extLst>
+            <c:ext xmlns:c16="http://schemas.microsoft.com/office/drawing/2014/chart" uri="{C3380CC4-5D6E-409C-BE32-E72D297353CC}">
+              <c16:uniqueId val="{00000001-7ACB-420D-AE05-7F86BBA6393A}"/>
+            </c:ext>
+          </c:extLst>
         </c:ser>
         <c:ser>
           <c:idx val="2"/>
@@ -719,18 +774,26 @@
           <c:invertIfNegative val="0"/>
           <c:dLbls>
             <c:numFmt formatCode="#,##0" sourceLinked="0"/>
+            <c:spPr>
+              <a:noFill/>
+              <a:ln>
+                <a:noFill/>
+              </a:ln>
+              <a:effectLst/>
+            </c:spPr>
             <c:txPr>
               <a:bodyPr/>
               <a:lstStyle/>
               <a:p>
                 <a:pPr>
-                  <a:defRPr b="0" i="0" strike="noStrike" sz="1000" u="none">
+                  <a:defRPr sz="1000" b="0" i="0" u="none" strike="noStrike">
                     <a:solidFill>
                       <a:srgbClr val="21295C"/>
                     </a:solidFill>
                     <a:latin typeface="Arial"/>
                   </a:defRPr>
                 </a:pPr>
+                <a:endParaRPr lang="en-US"/>
               </a:p>
             </c:txPr>
             <c:showLegendKey val="0"/>
@@ -740,25 +803,28 @@
             <c:showPercent val="0"/>
             <c:showBubbleSize val="0"/>
             <c:showLeaderLines val="0"/>
+            <c:extLst>
+              <c:ext xmlns:c15="http://schemas.microsoft.com/office/drawing/2012/chart" uri="{CE6537A1-D6FC-4f65-9D91-7224C49458BB}">
+                <c15:showLeaderLines val="0"/>
+              </c:ext>
+            </c:extLst>
           </c:dLbls>
           <c:cat>
-            <c:multiLvlStrRef>
+            <c:strRef>
               <c:f>Sheet1!$A$2:$A$4</c:f>
-              <c:multiLvlStrCache>
+              <c:strCache>
                 <c:ptCount val="3"/>
-                <c:lvl>
-                  <c:pt idx="0">
-                    <c:v>D1 Raw</c:v>
-                  </c:pt>
-                  <c:pt idx="1">
-                    <c:v>D2 Stat</c:v>
-                  </c:pt>
-                  <c:pt idx="2">
-                    <c:v>D3 Freq</c:v>
-                  </c:pt>
-                </c:lvl>
-              </c:multiLvlStrCache>
-            </c:multiLvlStrRef>
+                <c:pt idx="0">
+                  <c:v>D1 Raw</c:v>
+                </c:pt>
+                <c:pt idx="1">
+                  <c:v>D2 Stat</c:v>
+                </c:pt>
+                <c:pt idx="2">
+                  <c:v>D3 Freq</c:v>
+                </c:pt>
+              </c:strCache>
+            </c:strRef>
           </c:cat>
           <c:val>
             <c:numRef>
@@ -778,36 +844,23 @@
               </c:numCache>
             </c:numRef>
           </c:val>
+          <c:extLst>
+            <c:ext xmlns:c16="http://schemas.microsoft.com/office/drawing/2014/chart" uri="{C3380CC4-5D6E-409C-BE32-E72D297353CC}">
+              <c16:uniqueId val="{00000002-7ACB-420D-AE05-7F86BBA6393A}"/>
+            </c:ext>
+          </c:extLst>
         </c:ser>
         <c:dLbls>
-          <c:numFmt formatCode="#,##0" sourceLinked="0"/>
-          <c:txPr>
-            <a:bodyPr/>
-            <a:lstStyle/>
-            <a:p>
-              <a:pPr>
-                <a:defRPr b="0" i="0" strike="noStrike" sz="1000" u="none">
-                  <a:solidFill>
-                    <a:srgbClr val="21295C"/>
-                  </a:solidFill>
-                  <a:latin typeface="Arial"/>
-                </a:defRPr>
-              </a:pPr>
-            </a:p>
-          </c:txPr>
           <c:showLegendKey val="0"/>
           <c:showVal val="1"/>
           <c:showCatName val="0"/>
           <c:showSerName val="0"/>
           <c:showPercent val="0"/>
           <c:showBubbleSize val="0"/>
-          <c:showLeaderLines val="0"/>
         </c:dLbls>
         <c:gapWidth val="150"/>
-        <c:overlap val="0"/>
         <c:axId val="2094734554"/>
         <c:axId val="2094734552"/>
-        <c:axId val="2094734556"/>
       </c:barChart>
       <c:catAx>
         <c:axId val="2094734554"/>
@@ -848,6 +901,7 @@
         <c:crosses val="autoZero"/>
         <c:auto val="1"/>
         <c:lblAlgn val="ctr"/>
+        <c:lblOffset val="100"/>
         <c:noMultiLvlLbl val="1"/>
       </c:catAx>
       <c:valAx>
@@ -928,6 +982,7 @@
     </c:legend>
     <c:plotVisOnly val="1"/>
     <c:dispBlanksAs val="span"/>
+    <c:showDLblsOverMax val="1"/>
   </c:chart>
   <c:spPr>
     <a:noFill/>
@@ -943,9 +998,11 @@
 </file>
 
 <file path=ppt/charts/chart3.xml><?xml version="1.0" encoding="utf-8"?>
-<c:chartSpace xmlns:c="http://schemas.openxmlformats.org/drawingml/2006/chart" xmlns:a="http://schemas.openxmlformats.org/drawingml/2006/main" xmlns:r="http://schemas.openxmlformats.org/officeDocument/2006/relationships">
+<c:chartSpace xmlns:c="http://schemas.openxmlformats.org/drawingml/2006/chart" xmlns:a="http://schemas.openxmlformats.org/drawingml/2006/main" xmlns:r="http://schemas.openxmlformats.org/officeDocument/2006/relationships" xmlns:c16r2="http://schemas.microsoft.com/office/drawing/2015/06/chart">
   <c:date1904 val="0"/>
+  <c:lang val="en-US"/>
   <c:roundedCorners val="1"/>
+  <c:style val="2"/>
   <c:chart>
     <c:title>
       <c:tx>
@@ -973,7 +1030,6 @@
           </a:p>
         </c:rich>
       </c:tx>
-      <c:layout/>
       <c:overlay val="0"/>
     </c:title>
     <c:autoTitleDeleted val="0"/>
@@ -1006,18 +1062,26 @@
           <c:invertIfNegative val="0"/>
           <c:dLbls>
             <c:numFmt formatCode="0.00" sourceLinked="0"/>
+            <c:spPr>
+              <a:noFill/>
+              <a:ln>
+                <a:noFill/>
+              </a:ln>
+              <a:effectLst/>
+            </c:spPr>
             <c:txPr>
               <a:bodyPr/>
               <a:lstStyle/>
               <a:p>
                 <a:pPr>
-                  <a:defRPr b="0" i="0" strike="noStrike" sz="1000" u="none">
+                  <a:defRPr sz="1000" b="0" i="0" u="none" strike="noStrike">
                     <a:solidFill>
                       <a:srgbClr val="21295C"/>
                     </a:solidFill>
                     <a:latin typeface="Arial"/>
                   </a:defRPr>
                 </a:pPr>
+                <a:endParaRPr lang="en-US"/>
               </a:p>
             </c:txPr>
             <c:showLegendKey val="0"/>
@@ -1027,25 +1091,28 @@
             <c:showPercent val="0"/>
             <c:showBubbleSize val="0"/>
             <c:showLeaderLines val="0"/>
+            <c:extLst>
+              <c:ext xmlns:c15="http://schemas.microsoft.com/office/drawing/2012/chart" uri="{CE6537A1-D6FC-4f65-9D91-7224C49458BB}">
+                <c15:showLeaderLines val="0"/>
+              </c:ext>
+            </c:extLst>
           </c:dLbls>
           <c:cat>
-            <c:multiLvlStrRef>
+            <c:strRef>
               <c:f>Sheet1!$A$2:$A$4</c:f>
-              <c:multiLvlStrCache>
+              <c:strCache>
                 <c:ptCount val="3"/>
-                <c:lvl>
-                  <c:pt idx="0">
-                    <c:v>D1 Raw</c:v>
-                  </c:pt>
-                  <c:pt idx="1">
-                    <c:v>D2 Stat</c:v>
-                  </c:pt>
-                  <c:pt idx="2">
-                    <c:v>D3 Freq</c:v>
-                  </c:pt>
-                </c:lvl>
-              </c:multiLvlStrCache>
-            </c:multiLvlStrRef>
+                <c:pt idx="0">
+                  <c:v>D1 Raw</c:v>
+                </c:pt>
+                <c:pt idx="1">
+                  <c:v>D2 Stat</c:v>
+                </c:pt>
+                <c:pt idx="2">
+                  <c:v>D3 Freq</c:v>
+                </c:pt>
+              </c:strCache>
+            </c:strRef>
           </c:cat>
           <c:val>
             <c:numRef>
@@ -1054,17 +1121,22 @@
                 <c:formatCode>General</c:formatCode>
                 <c:ptCount val="3"/>
                 <c:pt idx="0">
-                  <c:v>0.836</c:v>
+                  <c:v>0.83599999999999997</c:v>
                 </c:pt>
                 <c:pt idx="1">
-                  <c:v>0.917</c:v>
+                  <c:v>0.91700000000000004</c:v>
                 </c:pt>
                 <c:pt idx="2">
-                  <c:v>0.978</c:v>
+                  <c:v>0.97799999999999998</c:v>
                 </c:pt>
               </c:numCache>
             </c:numRef>
           </c:val>
+          <c:extLst>
+            <c:ext xmlns:c16="http://schemas.microsoft.com/office/drawing/2014/chart" uri="{C3380CC4-5D6E-409C-BE32-E72D297353CC}">
+              <c16:uniqueId val="{00000000-2CEB-42AA-AD76-33B8F8ABEB2C}"/>
+            </c:ext>
+          </c:extLst>
         </c:ser>
         <c:ser>
           <c:idx val="1"/>
@@ -1089,18 +1161,26 @@
           <c:invertIfNegative val="0"/>
           <c:dLbls>
             <c:numFmt formatCode="0.00" sourceLinked="0"/>
+            <c:spPr>
+              <a:noFill/>
+              <a:ln>
+                <a:noFill/>
+              </a:ln>
+              <a:effectLst/>
+            </c:spPr>
             <c:txPr>
               <a:bodyPr/>
               <a:lstStyle/>
               <a:p>
                 <a:pPr>
-                  <a:defRPr b="0" i="0" strike="noStrike" sz="1000" u="none">
+                  <a:defRPr sz="1000" b="0" i="0" u="none" strike="noStrike">
                     <a:solidFill>
                       <a:srgbClr val="21295C"/>
                     </a:solidFill>
                     <a:latin typeface="Arial"/>
                   </a:defRPr>
                 </a:pPr>
+                <a:endParaRPr lang="en-US"/>
               </a:p>
             </c:txPr>
             <c:showLegendKey val="0"/>
@@ -1110,25 +1190,28 @@
             <c:showPercent val="0"/>
             <c:showBubbleSize val="0"/>
             <c:showLeaderLines val="0"/>
+            <c:extLst>
+              <c:ext xmlns:c15="http://schemas.microsoft.com/office/drawing/2012/chart" uri="{CE6537A1-D6FC-4f65-9D91-7224C49458BB}">
+                <c15:showLeaderLines val="0"/>
+              </c:ext>
+            </c:extLst>
           </c:dLbls>
           <c:cat>
-            <c:multiLvlStrRef>
+            <c:strRef>
               <c:f>Sheet1!$A$2:$A$4</c:f>
-              <c:multiLvlStrCache>
+              <c:strCache>
                 <c:ptCount val="3"/>
-                <c:lvl>
-                  <c:pt idx="0">
-                    <c:v>D1 Raw</c:v>
-                  </c:pt>
-                  <c:pt idx="1">
-                    <c:v>D2 Stat</c:v>
-                  </c:pt>
-                  <c:pt idx="2">
-                    <c:v>D3 Freq</c:v>
-                  </c:pt>
-                </c:lvl>
-              </c:multiLvlStrCache>
-            </c:multiLvlStrRef>
+                <c:pt idx="0">
+                  <c:v>D1 Raw</c:v>
+                </c:pt>
+                <c:pt idx="1">
+                  <c:v>D2 Stat</c:v>
+                </c:pt>
+                <c:pt idx="2">
+                  <c:v>D3 Freq</c:v>
+                </c:pt>
+              </c:strCache>
+            </c:strRef>
           </c:cat>
           <c:val>
             <c:numRef>
@@ -1140,14 +1223,19 @@
                   <c:v>0.83</c:v>
                 </c:pt>
                 <c:pt idx="1">
-                  <c:v>0.914</c:v>
+                  <c:v>0.91400000000000003</c:v>
                 </c:pt>
                 <c:pt idx="2">
-                  <c:v>0.981</c:v>
+                  <c:v>0.98099999999999998</c:v>
                 </c:pt>
               </c:numCache>
             </c:numRef>
           </c:val>
+          <c:extLst>
+            <c:ext xmlns:c16="http://schemas.microsoft.com/office/drawing/2014/chart" uri="{C3380CC4-5D6E-409C-BE32-E72D297353CC}">
+              <c16:uniqueId val="{00000001-2CEB-42AA-AD76-33B8F8ABEB2C}"/>
+            </c:ext>
+          </c:extLst>
         </c:ser>
         <c:ser>
           <c:idx val="2"/>
@@ -1172,18 +1260,26 @@
           <c:invertIfNegative val="0"/>
           <c:dLbls>
             <c:numFmt formatCode="0.00" sourceLinked="0"/>
+            <c:spPr>
+              <a:noFill/>
+              <a:ln>
+                <a:noFill/>
+              </a:ln>
+              <a:effectLst/>
+            </c:spPr>
             <c:txPr>
               <a:bodyPr/>
               <a:lstStyle/>
               <a:p>
                 <a:pPr>
-                  <a:defRPr b="0" i="0" strike="noStrike" sz="1000" u="none">
+                  <a:defRPr sz="1000" b="0" i="0" u="none" strike="noStrike">
                     <a:solidFill>
                       <a:srgbClr val="21295C"/>
                     </a:solidFill>
                     <a:latin typeface="Arial"/>
                   </a:defRPr>
                 </a:pPr>
+                <a:endParaRPr lang="en-US"/>
               </a:p>
             </c:txPr>
             <c:showLegendKey val="0"/>
@@ -1193,25 +1289,28 @@
             <c:showPercent val="0"/>
             <c:showBubbleSize val="0"/>
             <c:showLeaderLines val="0"/>
+            <c:extLst>
+              <c:ext xmlns:c15="http://schemas.microsoft.com/office/drawing/2012/chart" uri="{CE6537A1-D6FC-4f65-9D91-7224C49458BB}">
+                <c15:showLeaderLines val="0"/>
+              </c:ext>
+            </c:extLst>
           </c:dLbls>
           <c:cat>
-            <c:multiLvlStrRef>
+            <c:strRef>
               <c:f>Sheet1!$A$2:$A$4</c:f>
-              <c:multiLvlStrCache>
+              <c:strCache>
                 <c:ptCount val="3"/>
-                <c:lvl>
-                  <c:pt idx="0">
-                    <c:v>D1 Raw</c:v>
-                  </c:pt>
-                  <c:pt idx="1">
-                    <c:v>D2 Stat</c:v>
-                  </c:pt>
-                  <c:pt idx="2">
-                    <c:v>D3 Freq</c:v>
-                  </c:pt>
-                </c:lvl>
-              </c:multiLvlStrCache>
-            </c:multiLvlStrRef>
+                <c:pt idx="0">
+                  <c:v>D1 Raw</c:v>
+                </c:pt>
+                <c:pt idx="1">
+                  <c:v>D2 Stat</c:v>
+                </c:pt>
+                <c:pt idx="2">
+                  <c:v>D3 Freq</c:v>
+                </c:pt>
+              </c:strCache>
+            </c:strRef>
           </c:cat>
           <c:val>
             <c:numRef>
@@ -1223,44 +1322,31 @@
                   <c:v>0.83</c:v>
                 </c:pt>
                 <c:pt idx="1">
-                  <c:v>0.914</c:v>
+                  <c:v>0.91400000000000003</c:v>
                 </c:pt>
                 <c:pt idx="2">
-                  <c:v>0.981</c:v>
+                  <c:v>0.98099999999999998</c:v>
                 </c:pt>
               </c:numCache>
             </c:numRef>
           </c:val>
+          <c:extLst>
+            <c:ext xmlns:c16="http://schemas.microsoft.com/office/drawing/2014/chart" uri="{C3380CC4-5D6E-409C-BE32-E72D297353CC}">
+              <c16:uniqueId val="{00000002-2CEB-42AA-AD76-33B8F8ABEB2C}"/>
+            </c:ext>
+          </c:extLst>
         </c:ser>
         <c:dLbls>
-          <c:numFmt formatCode="0.00" sourceLinked="0"/>
-          <c:txPr>
-            <a:bodyPr/>
-            <a:lstStyle/>
-            <a:p>
-              <a:pPr>
-                <a:defRPr b="0" i="0" strike="noStrike" sz="1000" u="none">
-                  <a:solidFill>
-                    <a:srgbClr val="21295C"/>
-                  </a:solidFill>
-                  <a:latin typeface="Arial"/>
-                </a:defRPr>
-              </a:pPr>
-            </a:p>
-          </c:txPr>
           <c:showLegendKey val="0"/>
           <c:showVal val="1"/>
           <c:showCatName val="0"/>
           <c:showSerName val="0"/>
           <c:showPercent val="0"/>
           <c:showBubbleSize val="0"/>
-          <c:showLeaderLines val="0"/>
         </c:dLbls>
         <c:gapWidth val="150"/>
-        <c:overlap val="0"/>
         <c:axId val="2094734554"/>
         <c:axId val="2094734552"/>
-        <c:axId val="2094734556"/>
       </c:barChart>
       <c:catAx>
         <c:axId val="2094734554"/>
@@ -1301,6 +1387,7 @@
         <c:crosses val="autoZero"/>
         <c:auto val="1"/>
         <c:lblAlgn val="ctr"/>
+        <c:lblOffset val="100"/>
         <c:noMultiLvlLbl val="1"/>
       </c:catAx>
       <c:valAx>
@@ -1383,6 +1470,7 @@
     </c:legend>
     <c:plotVisOnly val="1"/>
     <c:dispBlanksAs val="span"/>
+    <c:showDLblsOverMax val="1"/>
   </c:chart>
   <c:spPr>
     <a:noFill/>
@@ -1419,234 +1507,10 @@
           <a:chExt cx="0" cy="0"/>
         </a:xfrm>
       </p:grpSpPr>
-      <p:sp>
-        <p:nvSpPr>
-          <p:cNvPr id="2" name="Header Placeholder 1"/>
-          <p:cNvSpPr>
-            <a:spLocks noGrp="1"/>
-          </p:cNvSpPr>
-          <p:nvPr>
-            <p:ph type="hdr" sz="quarter"/>
-          </p:nvPr>
-        </p:nvSpPr>
-        <p:spPr>
-          <a:xfrm>
-            <a:off x="0" y="0"/>
-            <a:ext cx="2971800" cy="458788"/>
-          </a:xfrm>
-          <a:prstGeom prst="rect">
-            <a:avLst/>
-          </a:prstGeom>
-        </p:spPr>
-        <p:txBody>
-          <a:bodyPr vert="horz" lIns="91440" tIns="45720" rIns="91440" bIns="45720" rtlCol="0"/>
-          <a:lstStyle>
-            <a:lvl1pPr algn="l">
-              <a:defRPr sz="1200"/>
-            </a:lvl1pPr>
-          </a:lstStyle>
-          <a:p>
-            <a:endParaRPr lang="en-US"/>
-          </a:p>
-        </p:txBody>
-      </p:sp>
-      <p:sp>
-        <p:nvSpPr>
-          <p:cNvPr id="3" name="Date Placeholder 2"/>
-          <p:cNvSpPr>
-            <a:spLocks noGrp="1"/>
-          </p:cNvSpPr>
-          <p:nvPr>
-            <p:ph type="dt" idx="1"/>
-          </p:nvPr>
-        </p:nvSpPr>
-        <p:spPr>
-          <a:xfrm>
-            <a:off x="3884613" y="0"/>
-            <a:ext cx="2971800" cy="458788"/>
-          </a:xfrm>
-          <a:prstGeom prst="rect">
-            <a:avLst/>
-          </a:prstGeom>
-        </p:spPr>
-        <p:txBody>
-          <a:bodyPr vert="horz" lIns="91440" tIns="45720" rIns="91440" bIns="45720" rtlCol="0"/>
-          <a:lstStyle>
-            <a:lvl1pPr algn="r">
-              <a:defRPr sz="1200"/>
-            </a:lvl1pPr>
-          </a:lstStyle>
-          <a:p>
-            <a:fld id="{5282F153-3F37-0F45-9E97-73ACFA13230C}" type="datetimeFigureOut">
-              <a:rPr lang="en-US"/>
-              <a:t>7/23/19</a:t>
-            </a:fld>
-            <a:endParaRPr lang="en-US"/>
-          </a:p>
-        </p:txBody>
-      </p:sp>
-      <p:sp>
-        <p:nvSpPr>
-          <p:cNvPr id="4" name="Slide Image Placeholder 3"/>
-          <p:cNvSpPr>
-            <a:spLocks noGrp="1" noRot="1" noChangeAspect="1"/>
-          </p:cNvSpPr>
-          <p:nvPr>
-            <p:ph type="sldImg" idx="2"/>
-          </p:nvPr>
-        </p:nvSpPr>
-        <p:spPr>
-          <a:xfrm>
-            <a:off x="685800" y="1143000"/>
-            <a:ext cx="5486400" cy="3086100"/>
-          </a:xfrm>
-          <a:prstGeom prst="rect">
-            <a:avLst/>
-          </a:prstGeom>
-          <a:noFill/>
-          <a:ln w="12700">
-            <a:solidFill>
-              <a:prstClr val="black"/>
-            </a:solidFill>
-          </a:ln>
-        </p:spPr>
-        <p:txBody>
-          <a:bodyPr vert="horz" lIns="91440" tIns="45720" rIns="91440" bIns="45720" rtlCol="0" anchor="ctr"/>
-          <a:lstStyle/>
-          <a:p>
-            <a:endParaRPr lang="en-US"/>
-          </a:p>
-        </p:txBody>
-      </p:sp>
-      <p:sp>
-        <p:nvSpPr>
-          <p:cNvPr id="5" name="Notes Placeholder 4"/>
-          <p:cNvSpPr>
-            <a:spLocks noGrp="1"/>
-          </p:cNvSpPr>
-          <p:nvPr>
-            <p:ph type="body" sz="quarter" idx="3"/>
-          </p:nvPr>
-        </p:nvSpPr>
-        <p:spPr>
-          <a:xfrm>
-            <a:off x="685800" y="4400550"/>
-            <a:ext cx="5486400" cy="3600450"/>
-          </a:xfrm>
-          <a:prstGeom prst="rect">
-            <a:avLst/>
-          </a:prstGeom>
-        </p:spPr>
-        <p:txBody>
-          <a:bodyPr vert="horz" lIns="91440" tIns="45720" rIns="91440" bIns="45720" rtlCol="0"/>
-          <a:lstStyle/>
-          <a:p>
-            <a:pPr lvl="0"/>
-            <a:r>
-              <a:rPr lang="en-US"/>
-              <a:t>Click to edit Master text styles</a:t>
-            </a:r>
-          </a:p>
-          <a:p>
-            <a:pPr lvl="1"/>
-            <a:r>
-              <a:rPr lang="en-US"/>
-              <a:t>Second level</a:t>
-            </a:r>
-          </a:p>
-          <a:p>
-            <a:pPr lvl="2"/>
-            <a:r>
-              <a:rPr lang="en-US"/>
-              <a:t>Third level</a:t>
-            </a:r>
-          </a:p>
-          <a:p>
-            <a:pPr lvl="3"/>
-            <a:r>
-              <a:rPr lang="en-US"/>
-              <a:t>Fourth level</a:t>
-            </a:r>
-          </a:p>
-          <a:p>
-            <a:pPr lvl="4"/>
-            <a:r>
-              <a:rPr lang="en-US"/>
-              <a:t>Fifth level</a:t>
-            </a:r>
-          </a:p>
-        </p:txBody>
-      </p:sp>
-      <p:sp>
-        <p:nvSpPr>
-          <p:cNvPr id="6" name="Footer Placeholder 5"/>
-          <p:cNvSpPr>
-            <a:spLocks noGrp="1"/>
-          </p:cNvSpPr>
-          <p:nvPr>
-            <p:ph type="ftr" sz="quarter" idx="4"/>
-          </p:nvPr>
-        </p:nvSpPr>
-        <p:spPr>
-          <a:xfrm>
-            <a:off x="0" y="8685213"/>
-            <a:ext cx="2971800" cy="458787"/>
-          </a:xfrm>
-          <a:prstGeom prst="rect">
-            <a:avLst/>
-          </a:prstGeom>
-        </p:spPr>
-        <p:txBody>
-          <a:bodyPr vert="horz" lIns="91440" tIns="45720" rIns="91440" bIns="45720" rtlCol="0" anchor="b"/>
-          <a:lstStyle>
-            <a:lvl1pPr algn="l">
-              <a:defRPr sz="1200"/>
-            </a:lvl1pPr>
-          </a:lstStyle>
-          <a:p>
-            <a:endParaRPr lang="en-US"/>
-          </a:p>
-        </p:txBody>
-      </p:sp>
-      <p:sp>
-        <p:nvSpPr>
-          <p:cNvPr id="7" name="Slide Number Placeholder 6"/>
-          <p:cNvSpPr>
-            <a:spLocks noGrp="1"/>
-          </p:cNvSpPr>
-          <p:nvPr>
-            <p:ph type="sldNum" sz="quarter" idx="5"/>
-          </p:nvPr>
-        </p:nvSpPr>
-        <p:spPr>
-          <a:xfrm>
-            <a:off x="3884613" y="8685213"/>
-            <a:ext cx="2971800" cy="458787"/>
-          </a:xfrm>
-          <a:prstGeom prst="rect">
-            <a:avLst/>
-          </a:prstGeom>
-        </p:spPr>
-        <p:txBody>
-          <a:bodyPr vert="horz" lIns="91440" tIns="45720" rIns="91440" bIns="45720" rtlCol="0" anchor="b"/>
-          <a:lstStyle>
-            <a:lvl1pPr algn="r">
-              <a:defRPr sz="1200"/>
-            </a:lvl1pPr>
-          </a:lstStyle>
-          <a:p>
-            <a:fld id="{CE5E9CC1-C706-0F49-92D6-E571CC5EEA8F}" type="slidenum">
-              <a:rPr lang="en-US"/>
-              <a:t>‹#›</a:t>
-            </a:fld>
-            <a:endParaRPr lang="en-US"/>
-          </a:p>
-        </p:txBody>
-      </p:sp>
     </p:spTree>
     <p:extLst>
       <p:ext uri="{BB962C8B-B14F-4D97-AF65-F5344CB8AC3E}">
-        <p14:creationId xmlns:p14="http://schemas.microsoft.com/office/powerpoint/2010/main" val="1024086991"/>
+        <p14:creationId xmlns:p14="http://schemas.microsoft.com/office/powerpoint/2010/main" val="4209314295"/>
       </p:ext>
     </p:extLst>
   </p:cSld>
@@ -1790,10 +1654,6 @@
           <a:bodyPr/>
           <a:lstStyle/>
           <a:p>
-            <a:r>
-              <a:rPr lang="en-US" dirty="0"/>
-              <a:t/>
-            </a:r>
             <a:endParaRPr lang="en-US" dirty="0"/>
           </a:p>
         </p:txBody>
@@ -1878,10 +1738,6 @@
           <a:bodyPr/>
           <a:lstStyle/>
           <a:p>
-            <a:r>
-              <a:rPr lang="en-US" dirty="0"/>
-              <a:t/>
-            </a:r>
             <a:endParaRPr lang="en-US" dirty="0"/>
           </a:p>
         </p:txBody>
@@ -1966,10 +1822,6 @@
           <a:bodyPr/>
           <a:lstStyle/>
           <a:p>
-            <a:r>
-              <a:rPr lang="en-US" dirty="0"/>
-              <a:t/>
-            </a:r>
             <a:endParaRPr lang="en-US" dirty="0"/>
           </a:p>
         </p:txBody>
@@ -2054,10 +1906,6 @@
           <a:bodyPr/>
           <a:lstStyle/>
           <a:p>
-            <a:r>
-              <a:rPr lang="en-US" dirty="0"/>
-              <a:t/>
-            </a:r>
             <a:endParaRPr lang="en-US" dirty="0"/>
           </a:p>
         </p:txBody>
@@ -2142,10 +1990,6 @@
           <a:bodyPr/>
           <a:lstStyle/>
           <a:p>
-            <a:r>
-              <a:rPr lang="en-US" dirty="0"/>
-              <a:t/>
-            </a:r>
             <a:endParaRPr lang="en-US" dirty="0"/>
           </a:p>
         </p:txBody>
@@ -2230,10 +2074,6 @@
           <a:bodyPr/>
           <a:lstStyle/>
           <a:p>
-            <a:r>
-              <a:rPr lang="en-US" dirty="0"/>
-              <a:t/>
-            </a:r>
             <a:endParaRPr lang="en-US" dirty="0"/>
           </a:p>
         </p:txBody>
@@ -2318,10 +2158,6 @@
           <a:bodyPr/>
           <a:lstStyle/>
           <a:p>
-            <a:r>
-              <a:rPr lang="en-US" dirty="0"/>
-              <a:t/>
-            </a:r>
             <a:endParaRPr lang="en-US" dirty="0"/>
           </a:p>
         </p:txBody>
@@ -2406,10 +2242,6 @@
           <a:bodyPr/>
           <a:lstStyle/>
           <a:p>
-            <a:r>
-              <a:rPr lang="en-US" dirty="0"/>
-              <a:t/>
-            </a:r>
             <a:endParaRPr lang="en-US" dirty="0"/>
           </a:p>
         </p:txBody>
@@ -2494,10 +2326,6 @@
           <a:bodyPr/>
           <a:lstStyle/>
           <a:p>
-            <a:r>
-              <a:rPr lang="en-US" dirty="0"/>
-              <a:t/>
-            </a:r>
             <a:endParaRPr lang="en-US" dirty="0"/>
           </a:p>
         </p:txBody>
@@ -2582,10 +2410,6 @@
           <a:bodyPr/>
           <a:lstStyle/>
           <a:p>
-            <a:r>
-              <a:rPr lang="en-US" dirty="0"/>
-              <a:t/>
-            </a:r>
             <a:endParaRPr lang="en-US" dirty="0"/>
           </a:p>
         </p:txBody>
@@ -2670,10 +2494,6 @@
           <a:bodyPr/>
           <a:lstStyle/>
           <a:p>
-            <a:r>
-              <a:rPr lang="en-US" dirty="0"/>
-              <a:t/>
-            </a:r>
             <a:endParaRPr lang="en-US" dirty="0"/>
           </a:p>
         </p:txBody>
@@ -2747,6 +2567,11 @@
 <file path=ppt/slideMasters/slideMaster1.xml><?xml version="1.0" encoding="utf-8"?>
 <p:sldMaster xmlns:a="http://schemas.openxmlformats.org/drawingml/2006/main" xmlns:r="http://schemas.openxmlformats.org/officeDocument/2006/relationships" xmlns:p="http://schemas.openxmlformats.org/presentationml/2006/main">
   <p:cSld>
+    <p:bg>
+      <p:bgRef idx="1001">
+        <a:schemeClr val="bg1"/>
+      </p:bgRef>
+    </p:bg>
     <p:spTree>
       <p:nvGrpSpPr>
         <p:cNvPr id="1" name=""/>
@@ -3029,6 +2854,7 @@
         <a:solidFill>
           <a:srgbClr val="21295C"/>
         </a:solidFill>
+        <a:effectLst/>
       </p:bgPr>
     </p:bg>
     <p:spTree>
@@ -3896,7 +3722,7 @@
           <a:bodyPr wrap="square" lIns="0" tIns="0" rIns="0" bIns="0" rtlCol="0" anchor="ctr"/>
           <a:lstStyle/>
           <a:p>
-            <a:pPr indent="0" marL="0">
+            <a:pPr marL="0" indent="0">
               <a:buNone/>
             </a:pPr>
             <a:r>
@@ -3935,7 +3761,7 @@
           <a:bodyPr wrap="square" lIns="0" tIns="0" rIns="0" bIns="0" rtlCol="0" anchor="ctr"/>
           <a:lstStyle/>
           <a:p>
-            <a:pPr indent="0" marL="0">
+            <a:pPr marL="0" indent="0">
               <a:buNone/>
             </a:pPr>
             <a:r>
@@ -3974,7 +3800,7 @@
           <a:bodyPr wrap="square" lIns="0" tIns="0" rIns="0" bIns="0" rtlCol="0" anchor="ctr"/>
           <a:lstStyle/>
           <a:p>
-            <a:pPr indent="0" marL="0">
+            <a:pPr marL="0" indent="0">
               <a:buNone/>
             </a:pPr>
             <a:r>
@@ -4033,11 +3859,11 @@
           <a:bodyPr wrap="square" lIns="0" tIns="0" rIns="0" bIns="0" rtlCol="0" anchor="ctr"/>
           <a:lstStyle/>
           <a:p>
-            <a:pPr indent="0" marL="0">
-              <a:buNone/>
-            </a:pPr>
-            <a:r>
-              <a:rPr lang="en-US" sz="1600" b="1" dirty="0">
+            <a:pPr marL="0" indent="0">
+              <a:buNone/>
+            </a:pPr>
+            <a:r>
+              <a:rPr lang="en-US" sz="1600" b="1" dirty="0" err="1" smtClean="0">
                 <a:solidFill>
                   <a:srgbClr val="FFFFFF"/>
                 </a:solidFill>
@@ -4045,12 +3871,34 @@
                 <a:ea typeface="Calibri" pitchFamily="34" charset="-122"/>
                 <a:cs typeface="Calibri" pitchFamily="34" charset="-120"/>
               </a:rPr>
-              <a:t>Student Name</a:t>
+              <a:t>Dilawaiz</a:t>
+            </a:r>
+            <a:r>
+              <a:rPr lang="en-US" sz="1600" b="1" dirty="0" smtClean="0">
+                <a:solidFill>
+                  <a:srgbClr val="FFFFFF"/>
+                </a:solidFill>
+                <a:latin typeface="Calibri" pitchFamily="34" charset="0"/>
+                <a:ea typeface="Calibri" pitchFamily="34" charset="-122"/>
+                <a:cs typeface="Calibri" pitchFamily="34" charset="-120"/>
+              </a:rPr>
+              <a:t> </a:t>
+            </a:r>
+            <a:r>
+              <a:rPr lang="en-US" sz="1600" b="1" dirty="0" err="1" smtClean="0">
+                <a:solidFill>
+                  <a:srgbClr val="FFFFFF"/>
+                </a:solidFill>
+                <a:latin typeface="Calibri" pitchFamily="34" charset="0"/>
+                <a:ea typeface="Calibri" pitchFamily="34" charset="-122"/>
+                <a:cs typeface="Calibri" pitchFamily="34" charset="-120"/>
+              </a:rPr>
+              <a:t>khadija</a:t>
             </a:r>
             <a:endParaRPr lang="en-US" sz="1600" dirty="0"/>
           </a:p>
           <a:p>
-            <a:pPr indent="0" marL="0">
+            <a:pPr marL="0" indent="0">
               <a:buNone/>
             </a:pPr>
             <a:r>
@@ -4067,7 +3915,7 @@
             <a:endParaRPr lang="en-US" sz="1600" dirty="0"/>
           </a:p>
           <a:p>
-            <a:pPr indent="0" marL="0">
+            <a:pPr marL="0" indent="0">
               <a:buNone/>
             </a:pPr>
             <a:r>
@@ -4101,6 +3949,7 @@
         <a:solidFill>
           <a:srgbClr val="21295C"/>
         </a:solidFill>
+        <a:effectLst/>
       </p:bgPr>
     </p:bg>
     <p:spTree>
@@ -4138,7 +3987,7 @@
           <a:bodyPr wrap="square" lIns="0" tIns="0" rIns="0" bIns="0" rtlCol="0" anchor="ctr"/>
           <a:lstStyle/>
           <a:p>
-            <a:pPr indent="0" marL="0">
+            <a:pPr marL="0" indent="0">
               <a:buNone/>
             </a:pPr>
             <a:r>
@@ -4177,7 +4026,7 @@
           <a:bodyPr wrap="square" lIns="0" tIns="0" rIns="0" bIns="0" rtlCol="0" anchor="ctr"/>
           <a:lstStyle/>
           <a:p>
-            <a:pPr indent="0" marL="0">
+            <a:pPr marL="0" indent="0">
               <a:buNone/>
             </a:pPr>
             <a:r>
@@ -4261,7 +4110,7 @@
           <a:bodyPr wrap="square" lIns="0" tIns="0" rIns="0" bIns="0" rtlCol="0" anchor="ctr"/>
           <a:lstStyle/>
           <a:p>
-            <a:pPr algn="ctr" indent="0" marL="0">
+            <a:pPr marL="0" indent="0" algn="ctr">
               <a:buNone/>
             </a:pPr>
             <a:r>
@@ -4300,7 +4149,7 @@
           <a:bodyPr wrap="square" lIns="0" tIns="0" rIns="0" bIns="0" rtlCol="0" anchor="ctr"/>
           <a:lstStyle/>
           <a:p>
-            <a:pPr algn="ctr" indent="0" marL="0">
+            <a:pPr marL="0" indent="0" algn="ctr">
               <a:buNone/>
             </a:pPr>
             <a:r>
@@ -4339,7 +4188,7 @@
           <a:bodyPr wrap="square" lIns="0" tIns="0" rIns="0" bIns="0" rtlCol="0" anchor="ctr"/>
           <a:lstStyle/>
           <a:p>
-            <a:pPr algn="ctr" indent="0" marL="0">
+            <a:pPr marL="0" indent="0" algn="ctr">
               <a:buNone/>
             </a:pPr>
             <a:r>
@@ -4447,7 +4296,7 @@
           <a:bodyPr wrap="square" lIns="0" tIns="0" rIns="0" bIns="0" rtlCol="0" anchor="ctr"/>
           <a:lstStyle/>
           <a:p>
-            <a:pPr algn="ctr" indent="0" marL="0">
+            <a:pPr marL="0" indent="0" algn="ctr">
               <a:buNone/>
             </a:pPr>
             <a:r>
@@ -4486,7 +4335,7 @@
           <a:bodyPr wrap="square" lIns="0" tIns="0" rIns="0" bIns="0" rtlCol="0" anchor="ctr"/>
           <a:lstStyle/>
           <a:p>
-            <a:pPr algn="ctr" indent="0" marL="0">
+            <a:pPr marL="0" indent="0" algn="ctr">
               <a:buNone/>
             </a:pPr>
             <a:r>
@@ -4525,7 +4374,7 @@
           <a:bodyPr wrap="square" lIns="0" tIns="0" rIns="0" bIns="0" rtlCol="0" anchor="ctr"/>
           <a:lstStyle/>
           <a:p>
-            <a:pPr algn="ctr" indent="0" marL="0">
+            <a:pPr marL="0" indent="0" algn="ctr">
               <a:buNone/>
             </a:pPr>
             <a:r>
@@ -4633,7 +4482,7 @@
           <a:bodyPr wrap="square" lIns="0" tIns="0" rIns="0" bIns="0" rtlCol="0" anchor="ctr"/>
           <a:lstStyle/>
           <a:p>
-            <a:pPr algn="ctr" indent="0" marL="0">
+            <a:pPr marL="0" indent="0" algn="ctr">
               <a:buNone/>
             </a:pPr>
             <a:r>
@@ -4672,7 +4521,7 @@
           <a:bodyPr wrap="square" lIns="0" tIns="0" rIns="0" bIns="0" rtlCol="0" anchor="ctr"/>
           <a:lstStyle/>
           <a:p>
-            <a:pPr algn="ctr" indent="0" marL="0">
+            <a:pPr marL="0" indent="0" algn="ctr">
               <a:buNone/>
             </a:pPr>
             <a:r>
@@ -4711,7 +4560,7 @@
           <a:bodyPr wrap="square" lIns="0" tIns="0" rIns="0" bIns="0" rtlCol="0" anchor="ctr"/>
           <a:lstStyle/>
           <a:p>
-            <a:pPr algn="ctr" indent="0" marL="0">
+            <a:pPr marL="0" indent="0" algn="ctr">
               <a:buNone/>
             </a:pPr>
             <a:r>
@@ -4819,7 +4668,7 @@
           <a:bodyPr wrap="square" lIns="0" tIns="0" rIns="0" bIns="0" rtlCol="0" anchor="ctr"/>
           <a:lstStyle/>
           <a:p>
-            <a:pPr algn="ctr" indent="0" marL="0">
+            <a:pPr marL="0" indent="0" algn="ctr">
               <a:buNone/>
             </a:pPr>
             <a:r>
@@ -4858,7 +4707,7 @@
           <a:bodyPr wrap="square" lIns="0" tIns="0" rIns="0" bIns="0" rtlCol="0" anchor="ctr"/>
           <a:lstStyle/>
           <a:p>
-            <a:pPr algn="ctr" indent="0" marL="0">
+            <a:pPr marL="0" indent="0" algn="ctr">
               <a:buNone/>
             </a:pPr>
             <a:r>
@@ -4897,7 +4746,7 @@
           <a:bodyPr wrap="square" lIns="0" tIns="0" rIns="0" bIns="0" rtlCol="0" anchor="ctr"/>
           <a:lstStyle/>
           <a:p>
-            <a:pPr algn="ctr" indent="0" marL="0">
+            <a:pPr marL="0" indent="0" algn="ctr">
               <a:buNone/>
             </a:pPr>
             <a:r>
@@ -4956,7 +4805,7 @@
           <a:bodyPr wrap="square" lIns="0" tIns="0" rIns="0" bIns="0" rtlCol="0" anchor="ctr"/>
           <a:lstStyle/>
           <a:p>
-            <a:pPr indent="0" marL="0">
+            <a:pPr marL="0" indent="0">
               <a:buNone/>
             </a:pPr>
             <a:r>
@@ -4995,7 +4844,7 @@
           <a:bodyPr wrap="square" lIns="0" tIns="0" rIns="0" bIns="0" rtlCol="0" anchor="ctr"/>
           <a:lstStyle/>
           <a:p>
-            <a:pPr algn="ctr" indent="0" marL="0">
+            <a:pPr marL="0" indent="0" algn="ctr">
               <a:buNone/>
             </a:pPr>
             <a:r>
@@ -5029,6 +4878,7 @@
         <a:solidFill>
           <a:srgbClr val="21295C"/>
         </a:solidFill>
+        <a:effectLst/>
       </p:bgPr>
     </p:bg>
     <p:spTree>
@@ -6416,7 +6266,7 @@
           <a:bodyPr wrap="square" lIns="0" tIns="0" rIns="0" bIns="0" rtlCol="0" anchor="ctr"/>
           <a:lstStyle/>
           <a:p>
-            <a:pPr algn="ctr" indent="0" marL="0">
+            <a:pPr marL="0" indent="0" algn="ctr">
               <a:buNone/>
             </a:pPr>
             <a:r>
@@ -6455,7 +6305,7 @@
           <a:bodyPr wrap="square" lIns="0" tIns="0" rIns="0" bIns="0" rtlCol="0" anchor="ctr"/>
           <a:lstStyle/>
           <a:p>
-            <a:pPr algn="ctr" indent="0" marL="0">
+            <a:pPr marL="0" indent="0" algn="ctr">
               <a:buNone/>
             </a:pPr>
             <a:r>
@@ -6514,7 +6364,7 @@
           <a:bodyPr wrap="square" lIns="0" tIns="0" rIns="0" bIns="0" rtlCol="0" anchor="ctr"/>
           <a:lstStyle/>
           <a:p>
-            <a:pPr algn="ctr" indent="0" marL="0">
+            <a:pPr marL="0" indent="0" algn="ctr">
               <a:buNone/>
             </a:pPr>
             <a:r>
@@ -6548,6 +6398,7 @@
         <a:solidFill>
           <a:srgbClr val="FFFFFF"/>
         </a:solidFill>
+        <a:effectLst/>
       </p:bgPr>
     </p:bg>
     <p:spTree>
@@ -6585,7 +6436,7 @@
           <a:bodyPr wrap="square" lIns="0" tIns="0" rIns="0" bIns="0" rtlCol="0" anchor="ctr"/>
           <a:lstStyle/>
           <a:p>
-            <a:pPr indent="0" marL="0">
+            <a:pPr marL="0" indent="0">
               <a:buNone/>
             </a:pPr>
             <a:r>
@@ -6624,7 +6475,7 @@
           <a:bodyPr wrap="square" lIns="0" tIns="0" rIns="0" bIns="0" rtlCol="0" anchor="ctr"/>
           <a:lstStyle/>
           <a:p>
-            <a:pPr indent="0" marL="0">
+            <a:pPr marL="0" indent="0">
               <a:buNone/>
             </a:pPr>
             <a:r>
@@ -6708,7 +6559,7 @@
           <a:bodyPr wrap="square" lIns="0" tIns="0" rIns="0" bIns="0" rtlCol="0" anchor="ctr"/>
           <a:lstStyle/>
           <a:p>
-            <a:pPr indent="0" marL="0">
+            <a:pPr marL="0" indent="0">
               <a:buNone/>
             </a:pPr>
             <a:r>
@@ -6747,7 +6598,7 @@
           <a:bodyPr wrap="square" rtlCol="0" anchor="ctr"/>
           <a:lstStyle/>
           <a:p>
-            <a:pPr indent="0" marL="0">
+            <a:pPr marL="0" indent="0">
               <a:buNone/>
             </a:pPr>
             <a:r>
@@ -6764,7 +6615,7 @@
             <a:endParaRPr lang="en-US" sz="1400" dirty="0"/>
           </a:p>
           <a:p>
-            <a:pPr indent="0" marL="0">
+            <a:pPr marL="0" indent="0">
               <a:buNone/>
             </a:pPr>
             <a:r>
@@ -6848,7 +6699,7 @@
           <a:bodyPr wrap="square" lIns="0" tIns="0" rIns="0" bIns="0" rtlCol="0" anchor="ctr"/>
           <a:lstStyle/>
           <a:p>
-            <a:pPr indent="0" marL="0">
+            <a:pPr marL="0" indent="0">
               <a:buNone/>
             </a:pPr>
             <a:r>
@@ -6887,7 +6738,7 @@
           <a:bodyPr wrap="square" rtlCol="0" anchor="ctr"/>
           <a:lstStyle/>
           <a:p>
-            <a:pPr indent="0" marL="0">
+            <a:pPr marL="0" indent="0">
               <a:buNone/>
             </a:pPr>
             <a:r>
@@ -6904,7 +6755,7 @@
             <a:endParaRPr lang="en-US" sz="1400" dirty="0"/>
           </a:p>
           <a:p>
-            <a:pPr indent="0" marL="0">
+            <a:pPr marL="0" indent="0">
               <a:buNone/>
             </a:pPr>
             <a:r>
@@ -6988,7 +6839,7 @@
           <a:bodyPr wrap="square" lIns="0" tIns="0" rIns="0" bIns="0" rtlCol="0" anchor="ctr"/>
           <a:lstStyle/>
           <a:p>
-            <a:pPr indent="0" marL="0">
+            <a:pPr marL="0" indent="0">
               <a:buNone/>
             </a:pPr>
             <a:r>
@@ -7027,7 +6878,7 @@
           <a:bodyPr wrap="square" rtlCol="0" anchor="ctr"/>
           <a:lstStyle/>
           <a:p>
-            <a:pPr indent="0" marL="0">
+            <a:pPr marL="0" indent="0">
               <a:buNone/>
             </a:pPr>
             <a:r>
@@ -7044,7 +6895,7 @@
             <a:endParaRPr lang="en-US" sz="1400" dirty="0"/>
           </a:p>
           <a:p>
-            <a:pPr indent="0" marL="0">
+            <a:pPr marL="0" indent="0">
               <a:buNone/>
             </a:pPr>
             <a:r>
@@ -7083,7 +6934,7 @@
           <a:bodyPr wrap="square" lIns="0" tIns="0" rIns="0" bIns="0" rtlCol="0" anchor="ctr"/>
           <a:lstStyle/>
           <a:p>
-            <a:pPr indent="0" marL="0">
+            <a:pPr marL="0" indent="0">
               <a:buNone/>
             </a:pPr>
             <a:r>
@@ -7223,6 +7074,7 @@
         <a:solidFill>
           <a:srgbClr val="FFFFFF"/>
         </a:solidFill>
+        <a:effectLst/>
       </p:bgPr>
     </p:bg>
     <p:spTree>
@@ -7260,7 +7112,7 @@
           <a:bodyPr wrap="square" lIns="0" tIns="0" rIns="0" bIns="0" rtlCol="0" anchor="ctr"/>
           <a:lstStyle/>
           <a:p>
-            <a:pPr indent="0" marL="0">
+            <a:pPr marL="0" indent="0">
               <a:buNone/>
             </a:pPr>
             <a:r>
@@ -7299,7 +7151,7 @@
           <a:bodyPr wrap="square" lIns="0" tIns="0" rIns="0" bIns="0" rtlCol="0" anchor="ctr"/>
           <a:lstStyle/>
           <a:p>
-            <a:pPr indent="0" marL="0">
+            <a:pPr marL="0" indent="0">
               <a:buNone/>
             </a:pPr>
             <a:r>
@@ -7341,7 +7193,7 @@
             <a:prstDash val="solid"/>
           </a:ln>
           <a:effectLst>
-            <a:outerShdw sx="100000" sy="100000" kx="0" ky="0" algn="bl" rotWithShape="0" blurRad="101600" dist="25400" dir="8100000">
+            <a:outerShdw blurRad="101600" dist="25400" dir="8100000" algn="bl" rotWithShape="0">
               <a:srgbClr val="000000">
                 <a:alpha val="8000"/>
               </a:srgbClr>
@@ -7390,11 +7242,11 @@
           <a:bodyPr wrap="square" rtlCol="0" anchor="ctr"/>
           <a:lstStyle/>
           <a:p>
-            <a:pPr indent="0" marL="0">
-              <a:buNone/>
-            </a:pPr>
-            <a:r>
-              <a:rPr lang="en-US" sz="1100" b="1" spc="200" kern="0" dirty="0">
+            <a:pPr marL="0" indent="0">
+              <a:buNone/>
+            </a:pPr>
+            <a:r>
+              <a:rPr lang="en-US" sz="1100" b="1" kern="0" spc="200" dirty="0">
                 <a:solidFill>
                   <a:srgbClr val="065A82"/>
                 </a:solidFill>
@@ -7429,7 +7281,7 @@
           <a:bodyPr wrap="square" lIns="0" tIns="0" rIns="0" bIns="0" rtlCol="0" anchor="ctr"/>
           <a:lstStyle/>
           <a:p>
-            <a:pPr indent="0" marL="0">
+            <a:pPr marL="0" indent="0">
               <a:buNone/>
             </a:pPr>
             <a:r>
@@ -7468,7 +7320,7 @@
           <a:bodyPr wrap="square" lIns="0" tIns="0" rIns="0" bIns="0" rtlCol="0" anchor="ctr"/>
           <a:lstStyle/>
           <a:p>
-            <a:pPr indent="0" marL="0">
+            <a:pPr marL="0" indent="0">
               <a:buNone/>
             </a:pPr>
             <a:r>
@@ -7507,7 +7359,7 @@
           <a:bodyPr wrap="square" lIns="0" tIns="0" rIns="0" bIns="0" rtlCol="0" anchor="ctr"/>
           <a:lstStyle/>
           <a:p>
-            <a:pPr indent="0" marL="0">
+            <a:pPr marL="0" indent="0">
               <a:buNone/>
             </a:pPr>
             <a:r>
@@ -7546,7 +7398,7 @@
           <a:bodyPr wrap="square" rtlCol="0" anchor="ctr"/>
           <a:lstStyle/>
           <a:p>
-            <a:pPr indent="0" marL="0">
+            <a:pPr marL="0" indent="0">
               <a:buNone/>
             </a:pPr>
             <a:r>
@@ -7563,7 +7415,7 @@
             <a:endParaRPr lang="en-US" sz="1300" dirty="0"/>
           </a:p>
           <a:p>
-            <a:pPr indent="0" marL="0">
+            <a:pPr marL="0" indent="0">
               <a:buNone/>
             </a:pPr>
             <a:r>
@@ -7605,7 +7457,7 @@
             <a:prstDash val="solid"/>
           </a:ln>
           <a:effectLst>
-            <a:outerShdw sx="100000" sy="100000" kx="0" ky="0" algn="bl" rotWithShape="0" blurRad="101600" dist="25400" dir="8100000">
+            <a:outerShdw blurRad="101600" dist="25400" dir="8100000" algn="bl" rotWithShape="0">
               <a:srgbClr val="000000">
                 <a:alpha val="8000"/>
               </a:srgbClr>
@@ -7654,11 +7506,11 @@
           <a:bodyPr wrap="square" rtlCol="0" anchor="ctr"/>
           <a:lstStyle/>
           <a:p>
-            <a:pPr indent="0" marL="0">
-              <a:buNone/>
-            </a:pPr>
-            <a:r>
-              <a:rPr lang="en-US" sz="1100" b="1" spc="200" kern="0" dirty="0">
+            <a:pPr marL="0" indent="0">
+              <a:buNone/>
+            </a:pPr>
+            <a:r>
+              <a:rPr lang="en-US" sz="1100" b="1" kern="0" spc="200" dirty="0">
                 <a:solidFill>
                   <a:srgbClr val="1C7293"/>
                 </a:solidFill>
@@ -7693,7 +7545,7 @@
           <a:bodyPr wrap="square" lIns="0" tIns="0" rIns="0" bIns="0" rtlCol="0" anchor="ctr"/>
           <a:lstStyle/>
           <a:p>
-            <a:pPr indent="0" marL="0">
+            <a:pPr marL="0" indent="0">
               <a:buNone/>
             </a:pPr>
             <a:r>
@@ -7732,7 +7584,7 @@
           <a:bodyPr wrap="square" lIns="0" tIns="0" rIns="0" bIns="0" rtlCol="0" anchor="ctr"/>
           <a:lstStyle/>
           <a:p>
-            <a:pPr indent="0" marL="0">
+            <a:pPr marL="0" indent="0">
               <a:buNone/>
             </a:pPr>
             <a:r>
@@ -7771,7 +7623,7 @@
           <a:bodyPr wrap="square" lIns="0" tIns="0" rIns="0" bIns="0" rtlCol="0" anchor="ctr"/>
           <a:lstStyle/>
           <a:p>
-            <a:pPr indent="0" marL="0">
+            <a:pPr marL="0" indent="0">
               <a:buNone/>
             </a:pPr>
             <a:r>
@@ -7810,7 +7662,7 @@
           <a:bodyPr wrap="square" rtlCol="0" anchor="ctr"/>
           <a:lstStyle/>
           <a:p>
-            <a:pPr indent="0" marL="0">
+            <a:pPr marL="0" indent="0">
               <a:buNone/>
             </a:pPr>
             <a:r>
@@ -7827,7 +7679,7 @@
             <a:endParaRPr lang="en-US" sz="1300" dirty="0"/>
           </a:p>
           <a:p>
-            <a:pPr indent="0" marL="0">
+            <a:pPr marL="0" indent="0">
               <a:buNone/>
             </a:pPr>
             <a:r>
@@ -7869,7 +7721,7 @@
             <a:prstDash val="solid"/>
           </a:ln>
           <a:effectLst>
-            <a:outerShdw sx="100000" sy="100000" kx="0" ky="0" algn="bl" rotWithShape="0" blurRad="101600" dist="25400" dir="8100000">
+            <a:outerShdw blurRad="101600" dist="25400" dir="8100000" algn="bl" rotWithShape="0">
               <a:srgbClr val="000000">
                 <a:alpha val="8000"/>
               </a:srgbClr>
@@ -7918,11 +7770,11 @@
           <a:bodyPr wrap="square" rtlCol="0" anchor="ctr"/>
           <a:lstStyle/>
           <a:p>
-            <a:pPr indent="0" marL="0">
-              <a:buNone/>
-            </a:pPr>
-            <a:r>
-              <a:rPr lang="en-US" sz="1100" b="1" spc="200" kern="0" dirty="0">
+            <a:pPr marL="0" indent="0">
+              <a:buNone/>
+            </a:pPr>
+            <a:r>
+              <a:rPr lang="en-US" sz="1100" b="1" kern="0" spc="200" dirty="0">
                 <a:solidFill>
                   <a:srgbClr val="10B981"/>
                 </a:solidFill>
@@ -7957,7 +7809,7 @@
           <a:bodyPr wrap="square" lIns="0" tIns="0" rIns="0" bIns="0" rtlCol="0" anchor="ctr"/>
           <a:lstStyle/>
           <a:p>
-            <a:pPr indent="0" marL="0">
+            <a:pPr marL="0" indent="0">
               <a:buNone/>
             </a:pPr>
             <a:r>
@@ -7996,7 +7848,7 @@
           <a:bodyPr wrap="square" lIns="0" tIns="0" rIns="0" bIns="0" rtlCol="0" anchor="ctr"/>
           <a:lstStyle/>
           <a:p>
-            <a:pPr indent="0" marL="0">
+            <a:pPr marL="0" indent="0">
               <a:buNone/>
             </a:pPr>
             <a:r>
@@ -8035,7 +7887,7 @@
           <a:bodyPr wrap="square" lIns="0" tIns="0" rIns="0" bIns="0" rtlCol="0" anchor="ctr"/>
           <a:lstStyle/>
           <a:p>
-            <a:pPr indent="0" marL="0">
+            <a:pPr marL="0" indent="0">
               <a:buNone/>
             </a:pPr>
             <a:r>
@@ -8074,7 +7926,7 @@
           <a:bodyPr wrap="square" rtlCol="0" anchor="ctr"/>
           <a:lstStyle/>
           <a:p>
-            <a:pPr indent="0" marL="0">
+            <a:pPr marL="0" indent="0">
               <a:buNone/>
             </a:pPr>
             <a:r>
@@ -8091,7 +7943,7 @@
             <a:endParaRPr lang="en-US" sz="1300" dirty="0"/>
           </a:p>
           <a:p>
-            <a:pPr indent="0" marL="0">
+            <a:pPr marL="0" indent="0">
               <a:buNone/>
             </a:pPr>
             <a:r>
@@ -8130,7 +7982,7 @@
           <a:bodyPr wrap="square" rtlCol="0" anchor="ctr"/>
           <a:lstStyle/>
           <a:p>
-            <a:pPr algn="ctr" indent="0" marL="0">
+            <a:pPr marL="0" indent="0" algn="ctr">
               <a:buNone/>
             </a:pPr>
             <a:r>
@@ -8164,6 +8016,7 @@
         <a:solidFill>
           <a:srgbClr val="FFFFFF"/>
         </a:solidFill>
+        <a:effectLst/>
       </p:bgPr>
     </p:bg>
     <p:spTree>
@@ -8201,7 +8054,7 @@
           <a:bodyPr wrap="square" lIns="0" tIns="0" rIns="0" bIns="0" rtlCol="0" anchor="ctr"/>
           <a:lstStyle/>
           <a:p>
-            <a:pPr indent="0" marL="0">
+            <a:pPr marL="0" indent="0">
               <a:buNone/>
             </a:pPr>
             <a:r>
@@ -8240,7 +8093,7 @@
           <a:bodyPr wrap="square" lIns="0" tIns="0" rIns="0" bIns="0" rtlCol="0" anchor="ctr"/>
           <a:lstStyle/>
           <a:p>
-            <a:pPr indent="0" marL="0">
+            <a:pPr marL="0" indent="0">
               <a:buNone/>
             </a:pPr>
             <a:r>
@@ -8279,7 +8132,7 @@
           <a:bodyPr wrap="square" lIns="0" tIns="0" rIns="0" bIns="0" rtlCol="0" anchor="ctr"/>
           <a:lstStyle/>
           <a:p>
-            <a:pPr indent="0" marL="0">
+            <a:pPr marL="0" indent="0">
               <a:buNone/>
             </a:pPr>
             <a:r>
@@ -8343,7 +8196,7 @@
           <a:bodyPr wrap="square" lIns="0" tIns="0" rIns="0" bIns="0" rtlCol="0" anchor="ctr"/>
           <a:lstStyle/>
           <a:p>
-            <a:pPr algn="ctr" indent="0" marL="0">
+            <a:pPr marL="0" indent="0" algn="ctr">
               <a:buNone/>
             </a:pPr>
             <a:r>
@@ -8382,7 +8235,7 @@
           <a:bodyPr wrap="square" lIns="0" tIns="0" rIns="0" bIns="0" rtlCol="0" anchor="ctr"/>
           <a:lstStyle/>
           <a:p>
-            <a:pPr indent="0" marL="0">
+            <a:pPr marL="0" indent="0">
               <a:buNone/>
             </a:pPr>
             <a:r>
@@ -8421,7 +8274,7 @@
           <a:bodyPr wrap="square" lIns="0" tIns="0" rIns="0" bIns="0" rtlCol="0" anchor="ctr"/>
           <a:lstStyle/>
           <a:p>
-            <a:pPr indent="0" marL="0">
+            <a:pPr marL="0" indent="0">
               <a:buNone/>
             </a:pPr>
             <a:r>
@@ -8509,7 +8362,7 @@
           <a:bodyPr wrap="square" lIns="0" tIns="0" rIns="0" bIns="0" rtlCol="0" anchor="ctr"/>
           <a:lstStyle/>
           <a:p>
-            <a:pPr algn="ctr" indent="0" marL="0">
+            <a:pPr marL="0" indent="0" algn="ctr">
               <a:buNone/>
             </a:pPr>
             <a:r>
@@ -8548,7 +8401,7 @@
           <a:bodyPr wrap="square" lIns="0" tIns="0" rIns="0" bIns="0" rtlCol="0" anchor="ctr"/>
           <a:lstStyle/>
           <a:p>
-            <a:pPr indent="0" marL="0">
+            <a:pPr marL="0" indent="0">
               <a:buNone/>
             </a:pPr>
             <a:r>
@@ -8587,7 +8440,7 @@
           <a:bodyPr wrap="square" lIns="0" tIns="0" rIns="0" bIns="0" rtlCol="0" anchor="ctr"/>
           <a:lstStyle/>
           <a:p>
-            <a:pPr indent="0" marL="0">
+            <a:pPr marL="0" indent="0">
               <a:buNone/>
             </a:pPr>
             <a:r>
@@ -8675,7 +8528,7 @@
           <a:bodyPr wrap="square" lIns="0" tIns="0" rIns="0" bIns="0" rtlCol="0" anchor="ctr"/>
           <a:lstStyle/>
           <a:p>
-            <a:pPr algn="ctr" indent="0" marL="0">
+            <a:pPr marL="0" indent="0" algn="ctr">
               <a:buNone/>
             </a:pPr>
             <a:r>
@@ -8714,7 +8567,7 @@
           <a:bodyPr wrap="square" lIns="0" tIns="0" rIns="0" bIns="0" rtlCol="0" anchor="ctr"/>
           <a:lstStyle/>
           <a:p>
-            <a:pPr indent="0" marL="0">
+            <a:pPr marL="0" indent="0">
               <a:buNone/>
             </a:pPr>
             <a:r>
@@ -8753,7 +8606,7 @@
           <a:bodyPr wrap="square" lIns="0" tIns="0" rIns="0" bIns="0" rtlCol="0" anchor="ctr"/>
           <a:lstStyle/>
           <a:p>
-            <a:pPr indent="0" marL="0">
+            <a:pPr marL="0" indent="0">
               <a:buNone/>
             </a:pPr>
             <a:r>
@@ -8792,7 +8645,7 @@
           <a:bodyPr wrap="square" lIns="0" tIns="0" rIns="0" bIns="0" rtlCol="0" anchor="ctr"/>
           <a:lstStyle/>
           <a:p>
-            <a:pPr indent="0" marL="0">
+            <a:pPr marL="0" indent="0">
               <a:buNone/>
             </a:pPr>
             <a:r>
@@ -8856,7 +8709,7 @@
           <a:bodyPr wrap="square" lIns="0" tIns="0" rIns="0" bIns="0" rtlCol="0" anchor="ctr"/>
           <a:lstStyle/>
           <a:p>
-            <a:pPr algn="ctr" indent="0" marL="0">
+            <a:pPr marL="0" indent="0" algn="ctr">
               <a:buNone/>
             </a:pPr>
             <a:r>
@@ -8895,7 +8748,7 @@
           <a:bodyPr wrap="square" lIns="0" tIns="0" rIns="0" bIns="0" rtlCol="0" anchor="ctr"/>
           <a:lstStyle/>
           <a:p>
-            <a:pPr indent="0" marL="0">
+            <a:pPr marL="0" indent="0">
               <a:buNone/>
             </a:pPr>
             <a:r>
@@ -8934,7 +8787,7 @@
           <a:bodyPr wrap="square" lIns="0" tIns="0" rIns="0" bIns="0" rtlCol="0" anchor="ctr"/>
           <a:lstStyle/>
           <a:p>
-            <a:pPr indent="0" marL="0">
+            <a:pPr marL="0" indent="0">
               <a:buNone/>
             </a:pPr>
             <a:r>
@@ -9022,7 +8875,7 @@
           <a:bodyPr wrap="square" lIns="0" tIns="0" rIns="0" bIns="0" rtlCol="0" anchor="ctr"/>
           <a:lstStyle/>
           <a:p>
-            <a:pPr algn="ctr" indent="0" marL="0">
+            <a:pPr marL="0" indent="0" algn="ctr">
               <a:buNone/>
             </a:pPr>
             <a:r>
@@ -9061,7 +8914,7 @@
           <a:bodyPr wrap="square" lIns="0" tIns="0" rIns="0" bIns="0" rtlCol="0" anchor="ctr"/>
           <a:lstStyle/>
           <a:p>
-            <a:pPr indent="0" marL="0">
+            <a:pPr marL="0" indent="0">
               <a:buNone/>
             </a:pPr>
             <a:r>
@@ -9100,7 +8953,7 @@
           <a:bodyPr wrap="square" lIns="0" tIns="0" rIns="0" bIns="0" rtlCol="0" anchor="ctr"/>
           <a:lstStyle/>
           <a:p>
-            <a:pPr indent="0" marL="0">
+            <a:pPr marL="0" indent="0">
               <a:buNone/>
             </a:pPr>
             <a:r>
@@ -9188,7 +9041,7 @@
           <a:bodyPr wrap="square" lIns="0" tIns="0" rIns="0" bIns="0" rtlCol="0" anchor="ctr"/>
           <a:lstStyle/>
           <a:p>
-            <a:pPr algn="ctr" indent="0" marL="0">
+            <a:pPr marL="0" indent="0" algn="ctr">
               <a:buNone/>
             </a:pPr>
             <a:r>
@@ -9227,7 +9080,7 @@
           <a:bodyPr wrap="square" lIns="0" tIns="0" rIns="0" bIns="0" rtlCol="0" anchor="ctr"/>
           <a:lstStyle/>
           <a:p>
-            <a:pPr indent="0" marL="0">
+            <a:pPr marL="0" indent="0">
               <a:buNone/>
             </a:pPr>
             <a:r>
@@ -9266,7 +9119,7 @@
           <a:bodyPr wrap="square" lIns="0" tIns="0" rIns="0" bIns="0" rtlCol="0" anchor="ctr"/>
           <a:lstStyle/>
           <a:p>
-            <a:pPr indent="0" marL="0">
+            <a:pPr marL="0" indent="0">
               <a:buNone/>
             </a:pPr>
             <a:r>
@@ -9325,7 +9178,7 @@
           <a:bodyPr wrap="square" lIns="0" tIns="0" rIns="0" bIns="0" rtlCol="0" anchor="ctr"/>
           <a:lstStyle/>
           <a:p>
-            <a:pPr indent="0" marL="0">
+            <a:pPr marL="0" indent="0">
               <a:buNone/>
             </a:pPr>
             <a:r>
@@ -9359,6 +9212,7 @@
         <a:solidFill>
           <a:srgbClr val="FFFFFF"/>
         </a:solidFill>
+        <a:effectLst/>
       </p:bgPr>
     </p:bg>
     <p:spTree>
@@ -9396,7 +9250,7 @@
           <a:bodyPr wrap="square" lIns="0" tIns="0" rIns="0" bIns="0" rtlCol="0" anchor="ctr"/>
           <a:lstStyle/>
           <a:p>
-            <a:pPr indent="0" marL="0">
+            <a:pPr marL="0" indent="0">
               <a:buNone/>
             </a:pPr>
             <a:r>
@@ -9435,7 +9289,7 @@
           <a:bodyPr wrap="square" lIns="0" tIns="0" rIns="0" bIns="0" rtlCol="0" anchor="ctr"/>
           <a:lstStyle/>
           <a:p>
-            <a:pPr indent="0" marL="0">
+            <a:pPr marL="0" indent="0">
               <a:buNone/>
             </a:pPr>
             <a:r>
@@ -9455,7 +9309,7 @@
       </p:sp>
       <p:graphicFrame>
         <p:nvGraphicFramePr>
-          <p:cNvPr id="4" name="Chart 0" descr=""/>
+          <p:cNvPr id="4" name="Chart 0"/>
           <p:cNvGraphicFramePr/>
           <p:nvPr/>
         </p:nvGraphicFramePr>
@@ -9463,9 +9317,9 @@
           <a:off x="457200" y="1645920"/>
           <a:ext cx="6400800" cy="4572000"/>
         </p:xfrm>
-        <a:graphic xmlns:a="http://schemas.openxmlformats.org/drawingml/2006/main">
+        <a:graphic>
           <a:graphicData uri="http://schemas.openxmlformats.org/drawingml/2006/chart">
-            <c:chart xmlns:c="http://schemas.openxmlformats.org/drawingml/2006/chart" r:id="rId1"/>
+            <c:chart xmlns:c="http://schemas.openxmlformats.org/drawingml/2006/chart" xmlns:r="http://schemas.openxmlformats.org/officeDocument/2006/relationships" r:id="rId3"/>
           </a:graphicData>
         </a:graphic>
       </p:graphicFrame>
@@ -9535,7 +9389,7 @@
           <a:bodyPr wrap="square" lIns="0" tIns="0" rIns="0" bIns="0" rtlCol="0" anchor="ctr"/>
           <a:lstStyle/>
           <a:p>
-            <a:pPr indent="0" marL="0">
+            <a:pPr marL="0" indent="0">
               <a:buNone/>
             </a:pPr>
             <a:r>
@@ -9574,7 +9428,7 @@
           <a:bodyPr wrap="square" lIns="0" tIns="0" rIns="0" bIns="0" rtlCol="0" anchor="ctr"/>
           <a:lstStyle/>
           <a:p>
-            <a:pPr indent="0" marL="0">
+            <a:pPr marL="0" indent="0">
               <a:buNone/>
             </a:pPr>
             <a:r>
@@ -9613,7 +9467,7 @@
           <a:bodyPr wrap="square" lIns="0" tIns="0" rIns="0" bIns="0" rtlCol="0" anchor="ctr"/>
           <a:lstStyle/>
           <a:p>
-            <a:pPr indent="0" marL="0">
+            <a:pPr marL="0" indent="0">
               <a:buNone/>
             </a:pPr>
             <a:r>
@@ -9697,7 +9551,7 @@
           <a:bodyPr wrap="square" lIns="0" tIns="0" rIns="0" bIns="0" rtlCol="0" anchor="ctr"/>
           <a:lstStyle/>
           <a:p>
-            <a:pPr indent="0" marL="0">
+            <a:pPr marL="0" indent="0">
               <a:buNone/>
             </a:pPr>
             <a:r>
@@ -9736,7 +9590,7 @@
           <a:bodyPr wrap="square" lIns="0" tIns="0" rIns="0" bIns="0" rtlCol="0" anchor="ctr"/>
           <a:lstStyle/>
           <a:p>
-            <a:pPr indent="0" marL="0">
+            <a:pPr marL="0" indent="0">
               <a:buNone/>
             </a:pPr>
             <a:r>
@@ -9775,7 +9629,7 @@
           <a:bodyPr wrap="square" lIns="0" tIns="0" rIns="0" bIns="0" rtlCol="0" anchor="ctr"/>
           <a:lstStyle/>
           <a:p>
-            <a:pPr indent="0" marL="0">
+            <a:pPr marL="0" indent="0">
               <a:buNone/>
             </a:pPr>
             <a:r>
@@ -9859,7 +9713,7 @@
           <a:bodyPr wrap="square" lIns="0" tIns="0" rIns="0" bIns="0" rtlCol="0" anchor="ctr"/>
           <a:lstStyle/>
           <a:p>
-            <a:pPr indent="0" marL="0">
+            <a:pPr marL="0" indent="0">
               <a:buNone/>
             </a:pPr>
             <a:r>
@@ -9898,7 +9752,7 @@
           <a:bodyPr wrap="square" lIns="0" tIns="0" rIns="0" bIns="0" rtlCol="0" anchor="ctr"/>
           <a:lstStyle/>
           <a:p>
-            <a:pPr indent="0" marL="0">
+            <a:pPr marL="0" indent="0">
               <a:buNone/>
             </a:pPr>
             <a:r>
@@ -9937,7 +9791,7 @@
           <a:bodyPr wrap="square" lIns="0" tIns="0" rIns="0" bIns="0" rtlCol="0" anchor="ctr"/>
           <a:lstStyle/>
           <a:p>
-            <a:pPr indent="0" marL="0">
+            <a:pPr marL="0" indent="0">
               <a:buNone/>
             </a:pPr>
             <a:r>
@@ -9971,6 +9825,7 @@
         <a:solidFill>
           <a:srgbClr val="FFFFFF"/>
         </a:solidFill>
+        <a:effectLst/>
       </p:bgPr>
     </p:bg>
     <p:spTree>
@@ -10008,7 +9863,7 @@
           <a:bodyPr wrap="square" lIns="0" tIns="0" rIns="0" bIns="0" rtlCol="0" anchor="ctr"/>
           <a:lstStyle/>
           <a:p>
-            <a:pPr indent="0" marL="0">
+            <a:pPr marL="0" indent="0">
               <a:buNone/>
             </a:pPr>
             <a:r>
@@ -10047,7 +9902,7 @@
           <a:bodyPr wrap="square" lIns="0" tIns="0" rIns="0" bIns="0" rtlCol="0" anchor="ctr"/>
           <a:lstStyle/>
           <a:p>
-            <a:pPr indent="0" marL="0">
+            <a:pPr marL="0" indent="0">
               <a:buNone/>
             </a:pPr>
             <a:r>
@@ -10067,14 +9922,14 @@
       </p:sp>
       <p:pic>
         <p:nvPicPr>
-          <p:cNvPr id="4" name="Image 0" descr="/home/claude/seizure_project/figures/learning_curves.png">    </p:cNvPr>
+          <p:cNvPr id="4" name="Image 0" descr="/home/claude/seizure_project/figures/learning_curves.png"/>
           <p:cNvPicPr>
             <a:picLocks noChangeAspect="1"/>
           </p:cNvPicPr>
           <p:nvPr/>
         </p:nvPicPr>
         <p:blipFill>
-          <a:blip r:embed="rId1"/>
+          <a:blip r:embed="rId3"/>
           <a:stretch>
             <a:fillRect/>
           </a:stretch>
@@ -10135,11 +9990,11 @@
           <a:bodyPr wrap="square" lIns="0" tIns="0" rIns="0" bIns="0" rtlCol="0" anchor="ctr"/>
           <a:lstStyle/>
           <a:p>
-            <a:pPr indent="0" marL="0">
-              <a:buNone/>
-            </a:pPr>
-            <a:r>
-              <a:rPr lang="en-US" sz="1300" b="1" spc="200" kern="0" dirty="0">
+            <a:pPr marL="0" indent="0">
+              <a:buNone/>
+            </a:pPr>
+            <a:r>
+              <a:rPr lang="en-US" sz="1300" b="1" kern="0" spc="200" dirty="0">
                 <a:solidFill>
                   <a:srgbClr val="F59E0B"/>
                 </a:solidFill>
@@ -10174,7 +10029,7 @@
           <a:bodyPr wrap="square" rtlCol="0" anchor="ctr"/>
           <a:lstStyle/>
           <a:p>
-            <a:pPr indent="0" marL="0">
+            <a:pPr marL="0" indent="0">
               <a:buNone/>
             </a:pPr>
             <a:r>
@@ -10191,7 +10046,7 @@
             <a:endParaRPr lang="en-US" sz="1300" dirty="0"/>
           </a:p>
           <a:p>
-            <a:pPr indent="0" marL="0">
+            <a:pPr marL="0" indent="0">
               <a:buNone/>
             </a:pPr>
             <a:r>
@@ -10208,7 +10063,7 @@
             <a:endParaRPr lang="en-US" sz="1300" dirty="0"/>
           </a:p>
           <a:p>
-            <a:pPr indent="0" marL="0">
+            <a:pPr marL="0" indent="0">
               <a:buNone/>
             </a:pPr>
             <a:r>
@@ -10272,11 +10127,11 @@
           <a:bodyPr wrap="square" lIns="0" tIns="0" rIns="0" bIns="0" rtlCol="0" anchor="ctr"/>
           <a:lstStyle/>
           <a:p>
-            <a:pPr indent="0" marL="0">
-              <a:buNone/>
-            </a:pPr>
-            <a:r>
-              <a:rPr lang="en-US" sz="1300" b="1" spc="200" kern="0" dirty="0">
+            <a:pPr marL="0" indent="0">
+              <a:buNone/>
+            </a:pPr>
+            <a:r>
+              <a:rPr lang="en-US" sz="1300" b="1" kern="0" spc="200" dirty="0">
                 <a:solidFill>
                   <a:srgbClr val="DC2626"/>
                 </a:solidFill>
@@ -10311,7 +10166,7 @@
           <a:bodyPr wrap="square" rtlCol="0" anchor="ctr"/>
           <a:lstStyle/>
           <a:p>
-            <a:pPr indent="0" marL="0">
+            <a:pPr marL="0" indent="0">
               <a:buNone/>
             </a:pPr>
             <a:r>
@@ -10328,7 +10183,7 @@
             <a:endParaRPr lang="en-US" sz="1300" dirty="0"/>
           </a:p>
           <a:p>
-            <a:pPr indent="0" marL="0">
+            <a:pPr marL="0" indent="0">
               <a:buNone/>
             </a:pPr>
             <a:r>
@@ -10345,7 +10200,7 @@
             <a:endParaRPr lang="en-US" sz="1300" dirty="0"/>
           </a:p>
           <a:p>
-            <a:pPr indent="0" marL="0">
+            <a:pPr marL="0" indent="0">
               <a:buNone/>
             </a:pPr>
             <a:r>
@@ -10365,14 +10220,14 @@
       </p:sp>
       <p:pic>
         <p:nvPicPr>
-          <p:cNvPr id="11" name="Image 1" descr="/home/claude/seizure_project/figures/validation_curve.png">    </p:cNvPr>
+          <p:cNvPr id="11" name="Image 1" descr="/home/claude/seizure_project/figures/validation_curve.png"/>
           <p:cNvPicPr>
             <a:picLocks noChangeAspect="1"/>
           </p:cNvPicPr>
           <p:nvPr/>
         </p:nvPicPr>
         <p:blipFill>
-          <a:blip r:embed="rId2"/>
+          <a:blip r:embed="rId4"/>
           <a:stretch>
             <a:fillRect/>
           </a:stretch>
@@ -10433,7 +10288,7 @@
           <a:bodyPr wrap="square" lIns="0" tIns="0" rIns="0" bIns="0" rtlCol="0" anchor="ctr"/>
           <a:lstStyle/>
           <a:p>
-            <a:pPr indent="0" marL="0">
+            <a:pPr marL="0" indent="0">
               <a:buNone/>
             </a:pPr>
             <a:r>
@@ -10472,7 +10327,7 @@
           <a:bodyPr wrap="square" rtlCol="0" anchor="ctr"/>
           <a:lstStyle/>
           <a:p>
-            <a:pPr indent="0" marL="0">
+            <a:pPr marL="0" indent="0">
               <a:buNone/>
             </a:pPr>
             <a:r>
@@ -10489,7 +10344,7 @@
             <a:endParaRPr lang="en-US" sz="1200" dirty="0"/>
           </a:p>
           <a:p>
-            <a:pPr indent="0" marL="0">
+            <a:pPr marL="0" indent="0">
               <a:buNone/>
             </a:pPr>
             <a:r>
@@ -10506,7 +10361,7 @@
             <a:endParaRPr lang="en-US" sz="1200" dirty="0"/>
           </a:p>
           <a:p>
-            <a:pPr indent="0" marL="0">
+            <a:pPr marL="0" indent="0">
               <a:buNone/>
             </a:pPr>
             <a:r>
@@ -10540,6 +10395,7 @@
         <a:solidFill>
           <a:srgbClr val="FFFFFF"/>
         </a:solidFill>
+        <a:effectLst/>
       </p:bgPr>
     </p:bg>
     <p:spTree>
@@ -10577,7 +10433,7 @@
           <a:bodyPr wrap="square" lIns="0" tIns="0" rIns="0" bIns="0" rtlCol="0" anchor="ctr"/>
           <a:lstStyle/>
           <a:p>
-            <a:pPr indent="0" marL="0">
+            <a:pPr marL="0" indent="0">
               <a:buNone/>
             </a:pPr>
             <a:r>
@@ -10616,7 +10472,7 @@
           <a:bodyPr wrap="square" lIns="0" tIns="0" rIns="0" bIns="0" rtlCol="0" anchor="ctr"/>
           <a:lstStyle/>
           <a:p>
-            <a:pPr indent="0" marL="0">
+            <a:pPr marL="0" indent="0">
               <a:buNone/>
             </a:pPr>
             <a:r>
@@ -10636,7 +10492,7 @@
       </p:sp>
       <p:graphicFrame>
         <p:nvGraphicFramePr>
-          <p:cNvPr id="4" name="Chart 0" descr=""/>
+          <p:cNvPr id="4" name="Chart 0"/>
           <p:cNvGraphicFramePr/>
           <p:nvPr/>
         </p:nvGraphicFramePr>
@@ -10644,15 +10500,15 @@
           <a:off x="457200" y="1645920"/>
           <a:ext cx="5943600" cy="4572000"/>
         </p:xfrm>
-        <a:graphic xmlns:a="http://schemas.openxmlformats.org/drawingml/2006/main">
+        <a:graphic>
           <a:graphicData uri="http://schemas.openxmlformats.org/drawingml/2006/chart">
-            <c:chart xmlns:c="http://schemas.openxmlformats.org/drawingml/2006/chart" r:id="rId1"/>
+            <c:chart xmlns:c="http://schemas.openxmlformats.org/drawingml/2006/chart" xmlns:r="http://schemas.openxmlformats.org/officeDocument/2006/relationships" r:id="rId3"/>
           </a:graphicData>
         </a:graphic>
       </p:graphicFrame>
       <p:graphicFrame>
         <p:nvGraphicFramePr>
-          <p:cNvPr id="5" name="Chart 1" descr=""/>
+          <p:cNvPr id="5" name="Chart 1"/>
           <p:cNvGraphicFramePr/>
           <p:nvPr/>
         </p:nvGraphicFramePr>
@@ -10660,9 +10516,9 @@
           <a:off x="6583680" y="1645920"/>
           <a:ext cx="5120640" cy="4572000"/>
         </p:xfrm>
-        <a:graphic xmlns:a="http://schemas.openxmlformats.org/drawingml/2006/main">
+        <a:graphic>
           <a:graphicData uri="http://schemas.openxmlformats.org/drawingml/2006/chart">
-            <c:chart xmlns:c="http://schemas.openxmlformats.org/drawingml/2006/chart" r:id="rId2"/>
+            <c:chart xmlns:c="http://schemas.openxmlformats.org/drawingml/2006/chart" xmlns:r="http://schemas.openxmlformats.org/officeDocument/2006/relationships" r:id="rId4"/>
           </a:graphicData>
         </a:graphic>
       </p:graphicFrame>
@@ -10682,6 +10538,7 @@
         <a:solidFill>
           <a:srgbClr val="FFFFFF"/>
         </a:solidFill>
+        <a:effectLst/>
       </p:bgPr>
     </p:bg>
     <p:spTree>
@@ -10719,7 +10576,7 @@
           <a:bodyPr wrap="square" lIns="0" tIns="0" rIns="0" bIns="0" rtlCol="0" anchor="ctr"/>
           <a:lstStyle/>
           <a:p>
-            <a:pPr indent="0" marL="0">
+            <a:pPr marL="0" indent="0">
               <a:buNone/>
             </a:pPr>
             <a:r>
@@ -10758,7 +10615,7 @@
           <a:bodyPr wrap="square" lIns="0" tIns="0" rIns="0" bIns="0" rtlCol="0" anchor="ctr"/>
           <a:lstStyle/>
           <a:p>
-            <a:pPr indent="0" marL="0">
+            <a:pPr marL="0" indent="0">
               <a:buNone/>
             </a:pPr>
             <a:r>
@@ -10778,14 +10635,14 @@
       </p:sp>
       <p:pic>
         <p:nvPicPr>
-          <p:cNvPr id="4" name="Image 0" descr="/home/claude/seizure_project/figures/pr_tradeoff.png">    </p:cNvPr>
+          <p:cNvPr id="4" name="Image 0" descr="/home/claude/seizure_project/figures/pr_tradeoff.png"/>
           <p:cNvPicPr>
             <a:picLocks noChangeAspect="1"/>
           </p:cNvPicPr>
           <p:nvPr/>
         </p:nvPicPr>
         <p:blipFill>
-          <a:blip r:embed="rId1"/>
+          <a:blip r:embed="rId3"/>
           <a:stretch>
             <a:fillRect/>
           </a:stretch>
@@ -10802,14 +10659,14 @@
       </p:pic>
       <p:pic>
         <p:nvPicPr>
-          <p:cNvPr id="5" name="Image 1" descr="/home/claude/seizure_project/figures/pr_auc_heat.png">    </p:cNvPr>
+          <p:cNvPr id="5" name="Image 1" descr="/home/claude/seizure_project/figures/pr_auc_heat.png"/>
           <p:cNvPicPr>
             <a:picLocks noChangeAspect="1"/>
           </p:cNvPicPr>
           <p:nvPr/>
         </p:nvPicPr>
         <p:blipFill>
-          <a:blip r:embed="rId2"/>
+          <a:blip r:embed="rId4"/>
           <a:stretch>
             <a:fillRect/>
           </a:stretch>
@@ -10845,7 +10702,7 @@
           <a:bodyPr wrap="square" lIns="0" tIns="0" rIns="0" bIns="0" rtlCol="0" anchor="ctr"/>
           <a:lstStyle/>
           <a:p>
-            <a:pPr indent="0" marL="0">
+            <a:pPr marL="0" indent="0">
               <a:buNone/>
             </a:pPr>
             <a:r>
@@ -10985,6 +10842,7 @@
         <a:solidFill>
           <a:srgbClr val="FFFFFF"/>
         </a:solidFill>
+        <a:effectLst/>
       </p:bgPr>
     </p:bg>
     <p:spTree>
@@ -11022,7 +10880,7 @@
           <a:bodyPr wrap="square" lIns="0" tIns="0" rIns="0" bIns="0" rtlCol="0" anchor="ctr"/>
           <a:lstStyle/>
           <a:p>
-            <a:pPr indent="0" marL="0">
+            <a:pPr marL="0" indent="0">
               <a:buNone/>
             </a:pPr>
             <a:r>
@@ -11064,7 +10922,7 @@
             <a:prstDash val="solid"/>
           </a:ln>
           <a:effectLst>
-            <a:outerShdw sx="100000" sy="100000" kx="0" ky="0" algn="bl" rotWithShape="0" blurRad="76200" dist="12700" dir="8100000">
+            <a:outerShdw blurRad="76200" dist="12700" dir="8100000" algn="bl" rotWithShape="0">
               <a:srgbClr val="000000">
                 <a:alpha val="8000"/>
               </a:srgbClr>
@@ -11133,7 +10991,7 @@
           <a:bodyPr wrap="square" lIns="0" tIns="0" rIns="0" bIns="0" rtlCol="0" anchor="ctr"/>
           <a:lstStyle/>
           <a:p>
-            <a:pPr algn="ctr" indent="0" marL="0">
+            <a:pPr marL="0" indent="0" algn="ctr">
               <a:buNone/>
             </a:pPr>
             <a:r>
@@ -11172,7 +11030,7 @@
           <a:bodyPr wrap="square" lIns="0" tIns="0" rIns="0" bIns="0" rtlCol="0" anchor="ctr"/>
           <a:lstStyle/>
           <a:p>
-            <a:pPr indent="0" marL="0">
+            <a:pPr marL="0" indent="0">
               <a:buNone/>
             </a:pPr>
             <a:r>
@@ -11211,7 +11069,7 @@
           <a:bodyPr wrap="square" lIns="0" tIns="0" rIns="0" bIns="0" rtlCol="0" anchor="ctr"/>
           <a:lstStyle/>
           <a:p>
-            <a:pPr indent="0" marL="0">
+            <a:pPr marL="0" indent="0">
               <a:buNone/>
             </a:pPr>
             <a:r>
@@ -11250,7 +11108,7 @@
           <a:bodyPr wrap="square" rtlCol="0" anchor="ctr"/>
           <a:lstStyle/>
           <a:p>
-            <a:pPr indent="0" marL="0">
+            <a:pPr marL="0" indent="0">
               <a:buNone/>
             </a:pPr>
             <a:r>
@@ -11292,7 +11150,7 @@
             <a:prstDash val="solid"/>
           </a:ln>
           <a:effectLst>
-            <a:outerShdw sx="100000" sy="100000" kx="0" ky="0" algn="bl" rotWithShape="0" blurRad="76200" dist="12700" dir="8100000">
+            <a:outerShdw blurRad="76200" dist="12700" dir="8100000" algn="bl" rotWithShape="0">
               <a:srgbClr val="000000">
                 <a:alpha val="8000"/>
               </a:srgbClr>
@@ -11361,7 +11219,7 @@
           <a:bodyPr wrap="square" lIns="0" tIns="0" rIns="0" bIns="0" rtlCol="0" anchor="ctr"/>
           <a:lstStyle/>
           <a:p>
-            <a:pPr algn="ctr" indent="0" marL="0">
+            <a:pPr marL="0" indent="0" algn="ctr">
               <a:buNone/>
             </a:pPr>
             <a:r>
@@ -11400,7 +11258,7 @@
           <a:bodyPr wrap="square" lIns="0" tIns="0" rIns="0" bIns="0" rtlCol="0" anchor="ctr"/>
           <a:lstStyle/>
           <a:p>
-            <a:pPr indent="0" marL="0">
+            <a:pPr marL="0" indent="0">
               <a:buNone/>
             </a:pPr>
             <a:r>
@@ -11439,7 +11297,7 @@
           <a:bodyPr wrap="square" lIns="0" tIns="0" rIns="0" bIns="0" rtlCol="0" anchor="ctr"/>
           <a:lstStyle/>
           <a:p>
-            <a:pPr indent="0" marL="0">
+            <a:pPr marL="0" indent="0">
               <a:buNone/>
             </a:pPr>
             <a:r>
@@ -11478,7 +11336,7 @@
           <a:bodyPr wrap="square" rtlCol="0" anchor="ctr"/>
           <a:lstStyle/>
           <a:p>
-            <a:pPr indent="0" marL="0">
+            <a:pPr marL="0" indent="0">
               <a:buNone/>
             </a:pPr>
             <a:r>
@@ -11520,7 +11378,7 @@
             <a:prstDash val="solid"/>
           </a:ln>
           <a:effectLst>
-            <a:outerShdw sx="100000" sy="100000" kx="0" ky="0" algn="bl" rotWithShape="0" blurRad="76200" dist="12700" dir="8100000">
+            <a:outerShdw blurRad="76200" dist="12700" dir="8100000" algn="bl" rotWithShape="0">
               <a:srgbClr val="000000">
                 <a:alpha val="8000"/>
               </a:srgbClr>
@@ -11589,7 +11447,7 @@
           <a:bodyPr wrap="square" lIns="0" tIns="0" rIns="0" bIns="0" rtlCol="0" anchor="ctr"/>
           <a:lstStyle/>
           <a:p>
-            <a:pPr algn="ctr" indent="0" marL="0">
+            <a:pPr marL="0" indent="0" algn="ctr">
               <a:buNone/>
             </a:pPr>
             <a:r>
@@ -11628,7 +11486,7 @@
           <a:bodyPr wrap="square" lIns="0" tIns="0" rIns="0" bIns="0" rtlCol="0" anchor="ctr"/>
           <a:lstStyle/>
           <a:p>
-            <a:pPr indent="0" marL="0">
+            <a:pPr marL="0" indent="0">
               <a:buNone/>
             </a:pPr>
             <a:r>
@@ -11667,7 +11525,7 @@
           <a:bodyPr wrap="square" lIns="0" tIns="0" rIns="0" bIns="0" rtlCol="0" anchor="ctr"/>
           <a:lstStyle/>
           <a:p>
-            <a:pPr indent="0" marL="0">
+            <a:pPr marL="0" indent="0">
               <a:buNone/>
             </a:pPr>
             <a:r>
@@ -11706,7 +11564,7 @@
           <a:bodyPr wrap="square" rtlCol="0" anchor="ctr"/>
           <a:lstStyle/>
           <a:p>
-            <a:pPr indent="0" marL="0">
+            <a:pPr marL="0" indent="0">
               <a:buNone/>
             </a:pPr>
             <a:r>
@@ -11748,7 +11606,7 @@
             <a:prstDash val="solid"/>
           </a:ln>
           <a:effectLst>
-            <a:outerShdw sx="100000" sy="100000" kx="0" ky="0" algn="bl" rotWithShape="0" blurRad="76200" dist="12700" dir="8100000">
+            <a:outerShdw blurRad="76200" dist="12700" dir="8100000" algn="bl" rotWithShape="0">
               <a:srgbClr val="000000">
                 <a:alpha val="8000"/>
               </a:srgbClr>
@@ -11817,7 +11675,7 @@
           <a:bodyPr wrap="square" lIns="0" tIns="0" rIns="0" bIns="0" rtlCol="0" anchor="ctr"/>
           <a:lstStyle/>
           <a:p>
-            <a:pPr algn="ctr" indent="0" marL="0">
+            <a:pPr marL="0" indent="0" algn="ctr">
               <a:buNone/>
             </a:pPr>
             <a:r>
@@ -11856,7 +11714,7 @@
           <a:bodyPr wrap="square" lIns="0" tIns="0" rIns="0" bIns="0" rtlCol="0" anchor="ctr"/>
           <a:lstStyle/>
           <a:p>
-            <a:pPr indent="0" marL="0">
+            <a:pPr marL="0" indent="0">
               <a:buNone/>
             </a:pPr>
             <a:r>
@@ -11895,7 +11753,7 @@
           <a:bodyPr wrap="square" lIns="0" tIns="0" rIns="0" bIns="0" rtlCol="0" anchor="ctr"/>
           <a:lstStyle/>
           <a:p>
-            <a:pPr indent="0" marL="0">
+            <a:pPr marL="0" indent="0">
               <a:buNone/>
             </a:pPr>
             <a:r>
@@ -11934,7 +11792,7 @@
           <a:bodyPr wrap="square" rtlCol="0" anchor="ctr"/>
           <a:lstStyle/>
           <a:p>
-            <a:pPr indent="0" marL="0">
+            <a:pPr marL="0" indent="0">
               <a:buNone/>
             </a:pPr>
             <a:r>
@@ -12253,4 +12111,265 @@
     </a:ext>
   </a:extLst>
 </a:theme>
+</file>
+
+<file path=ppt/theme/theme2.xml><?xml version="1.0" encoding="utf-8"?>
+<a:theme xmlns:a="http://schemas.openxmlformats.org/drawingml/2006/main" name="Office Theme">
+  <a:themeElements>
+    <a:clrScheme name="Office">
+      <a:dk1>
+        <a:sysClr val="windowText" lastClr="000000"/>
+      </a:dk1>
+      <a:lt1>
+        <a:sysClr val="window" lastClr="FFFFFF"/>
+      </a:lt1>
+      <a:dk2>
+        <a:srgbClr val="44546A"/>
+      </a:dk2>
+      <a:lt2>
+        <a:srgbClr val="E7E6E6"/>
+      </a:lt2>
+      <a:accent1>
+        <a:srgbClr val="5B9BD5"/>
+      </a:accent1>
+      <a:accent2>
+        <a:srgbClr val="ED7D31"/>
+      </a:accent2>
+      <a:accent3>
+        <a:srgbClr val="A5A5A5"/>
+      </a:accent3>
+      <a:accent4>
+        <a:srgbClr val="FFC000"/>
+      </a:accent4>
+      <a:accent5>
+        <a:srgbClr val="4472C4"/>
+      </a:accent5>
+      <a:accent6>
+        <a:srgbClr val="70AD47"/>
+      </a:accent6>
+      <a:hlink>
+        <a:srgbClr val="0563C1"/>
+      </a:hlink>
+      <a:folHlink>
+        <a:srgbClr val="954F72"/>
+      </a:folHlink>
+    </a:clrScheme>
+    <a:fontScheme name="Office">
+      <a:majorFont>
+        <a:latin typeface="Calibri Light" panose="020F0302020204030204"/>
+        <a:ea typeface=""/>
+        <a:cs typeface=""/>
+        <a:font script="Jpan" typeface="游ゴシック Light"/>
+        <a:font script="Hang" typeface="맑은 고딕"/>
+        <a:font script="Hans" typeface="等线 Light"/>
+        <a:font script="Hant" typeface="新細明體"/>
+        <a:font script="Arab" typeface="Times New Roman"/>
+        <a:font script="Hebr" typeface="Times New Roman"/>
+        <a:font script="Thai" typeface="Angsana New"/>
+        <a:font script="Ethi" typeface="Nyala"/>
+        <a:font script="Beng" typeface="Vrinda"/>
+        <a:font script="Gujr" typeface="Shruti"/>
+        <a:font script="Khmr" typeface="MoolBoran"/>
+        <a:font script="Knda" typeface="Tunga"/>
+        <a:font script="Guru" typeface="Raavi"/>
+        <a:font script="Cans" typeface="Euphemia"/>
+        <a:font script="Cher" typeface="Plantagenet Cherokee"/>
+        <a:font script="Yiii" typeface="Microsoft Yi Baiti"/>
+        <a:font script="Tibt" typeface="Microsoft Himalaya"/>
+        <a:font script="Thaa" typeface="MV Boli"/>
+        <a:font script="Deva" typeface="Mangal"/>
+        <a:font script="Telu" typeface="Gautami"/>
+        <a:font script="Taml" typeface="Latha"/>
+        <a:font script="Syrc" typeface="Estrangelo Edessa"/>
+        <a:font script="Orya" typeface="Kalinga"/>
+        <a:font script="Mlym" typeface="Kartika"/>
+        <a:font script="Laoo" typeface="DokChampa"/>
+        <a:font script="Sinh" typeface="Iskoola Pota"/>
+        <a:font script="Mong" typeface="Mongolian Baiti"/>
+        <a:font script="Viet" typeface="Times New Roman"/>
+        <a:font script="Uigh" typeface="Microsoft Uighur"/>
+        <a:font script="Geor" typeface="Sylfaen"/>
+      </a:majorFont>
+      <a:minorFont>
+        <a:latin typeface="Calibri" panose="020F0502020204030204"/>
+        <a:ea typeface=""/>
+        <a:cs typeface=""/>
+        <a:font script="Jpan" typeface="游ゴシック"/>
+        <a:font script="Hang" typeface="맑은 고딕"/>
+        <a:font script="Hans" typeface="等线"/>
+        <a:font script="Hant" typeface="新細明體"/>
+        <a:font script="Arab" typeface="Arial"/>
+        <a:font script="Hebr" typeface="Arial"/>
+        <a:font script="Thai" typeface="Cordia New"/>
+        <a:font script="Ethi" typeface="Nyala"/>
+        <a:font script="Beng" typeface="Vrinda"/>
+        <a:font script="Gujr" typeface="Shruti"/>
+        <a:font script="Khmr" typeface="DaunPenh"/>
+        <a:font script="Knda" typeface="Tunga"/>
+        <a:font script="Guru" typeface="Raavi"/>
+        <a:font script="Cans" typeface="Euphemia"/>
+        <a:font script="Cher" typeface="Plantagenet Cherokee"/>
+        <a:font script="Yiii" typeface="Microsoft Yi Baiti"/>
+        <a:font script="Tibt" typeface="Microsoft Himalaya"/>
+        <a:font script="Thaa" typeface="MV Boli"/>
+        <a:font script="Deva" typeface="Mangal"/>
+        <a:font script="Telu" typeface="Gautami"/>
+        <a:font script="Taml" typeface="Latha"/>
+        <a:font script="Syrc" typeface="Estrangelo Edessa"/>
+        <a:font script="Orya" typeface="Kalinga"/>
+        <a:font script="Mlym" typeface="Kartika"/>
+        <a:font script="Laoo" typeface="DokChampa"/>
+        <a:font script="Sinh" typeface="Iskoola Pota"/>
+        <a:font script="Mong" typeface="Mongolian Baiti"/>
+        <a:font script="Viet" typeface="Arial"/>
+        <a:font script="Uigh" typeface="Microsoft Uighur"/>
+        <a:font script="Geor" typeface="Sylfaen"/>
+      </a:minorFont>
+    </a:fontScheme>
+    <a:fmtScheme name="Office">
+      <a:fillStyleLst>
+        <a:solidFill>
+          <a:schemeClr val="phClr"/>
+        </a:solidFill>
+        <a:gradFill rotWithShape="1">
+          <a:gsLst>
+            <a:gs pos="0">
+              <a:schemeClr val="phClr">
+                <a:lumMod val="110000"/>
+                <a:satMod val="105000"/>
+                <a:tint val="67000"/>
+              </a:schemeClr>
+            </a:gs>
+            <a:gs pos="50000">
+              <a:schemeClr val="phClr">
+                <a:lumMod val="105000"/>
+                <a:satMod val="103000"/>
+                <a:tint val="73000"/>
+              </a:schemeClr>
+            </a:gs>
+            <a:gs pos="100000">
+              <a:schemeClr val="phClr">
+                <a:lumMod val="105000"/>
+                <a:satMod val="109000"/>
+                <a:tint val="81000"/>
+              </a:schemeClr>
+            </a:gs>
+          </a:gsLst>
+          <a:lin ang="5400000" scaled="0"/>
+        </a:gradFill>
+        <a:gradFill rotWithShape="1">
+          <a:gsLst>
+            <a:gs pos="0">
+              <a:schemeClr val="phClr">
+                <a:satMod val="103000"/>
+                <a:lumMod val="102000"/>
+                <a:tint val="94000"/>
+              </a:schemeClr>
+            </a:gs>
+            <a:gs pos="50000">
+              <a:schemeClr val="phClr">
+                <a:satMod val="110000"/>
+                <a:lumMod val="100000"/>
+                <a:shade val="100000"/>
+              </a:schemeClr>
+            </a:gs>
+            <a:gs pos="100000">
+              <a:schemeClr val="phClr">
+                <a:lumMod val="99000"/>
+                <a:satMod val="120000"/>
+                <a:shade val="78000"/>
+              </a:schemeClr>
+            </a:gs>
+          </a:gsLst>
+          <a:lin ang="5400000" scaled="0"/>
+        </a:gradFill>
+      </a:fillStyleLst>
+      <a:lnStyleLst>
+        <a:ln w="6350" cap="flat" cmpd="sng" algn="ctr">
+          <a:solidFill>
+            <a:schemeClr val="phClr"/>
+          </a:solidFill>
+          <a:prstDash val="solid"/>
+          <a:miter lim="800000"/>
+        </a:ln>
+        <a:ln w="12700" cap="flat" cmpd="sng" algn="ctr">
+          <a:solidFill>
+            <a:schemeClr val="phClr"/>
+          </a:solidFill>
+          <a:prstDash val="solid"/>
+          <a:miter lim="800000"/>
+        </a:ln>
+        <a:ln w="19050" cap="flat" cmpd="sng" algn="ctr">
+          <a:solidFill>
+            <a:schemeClr val="phClr"/>
+          </a:solidFill>
+          <a:prstDash val="solid"/>
+          <a:miter lim="800000"/>
+        </a:ln>
+      </a:lnStyleLst>
+      <a:effectStyleLst>
+        <a:effectStyle>
+          <a:effectLst/>
+        </a:effectStyle>
+        <a:effectStyle>
+          <a:effectLst/>
+        </a:effectStyle>
+        <a:effectStyle>
+          <a:effectLst>
+            <a:outerShdw blurRad="57150" dist="19050" dir="5400000" algn="ctr" rotWithShape="0">
+              <a:srgbClr val="000000">
+                <a:alpha val="63000"/>
+              </a:srgbClr>
+            </a:outerShdw>
+          </a:effectLst>
+        </a:effectStyle>
+      </a:effectStyleLst>
+      <a:bgFillStyleLst>
+        <a:solidFill>
+          <a:schemeClr val="phClr"/>
+        </a:solidFill>
+        <a:solidFill>
+          <a:schemeClr val="phClr">
+            <a:tint val="95000"/>
+            <a:satMod val="170000"/>
+          </a:schemeClr>
+        </a:solidFill>
+        <a:gradFill rotWithShape="1">
+          <a:gsLst>
+            <a:gs pos="0">
+              <a:schemeClr val="phClr">
+                <a:tint val="93000"/>
+                <a:satMod val="150000"/>
+                <a:shade val="98000"/>
+                <a:lumMod val="102000"/>
+              </a:schemeClr>
+            </a:gs>
+            <a:gs pos="50000">
+              <a:schemeClr val="phClr">
+                <a:tint val="98000"/>
+                <a:satMod val="130000"/>
+                <a:shade val="90000"/>
+                <a:lumMod val="103000"/>
+              </a:schemeClr>
+            </a:gs>
+            <a:gs pos="100000">
+              <a:schemeClr val="phClr">
+                <a:shade val="63000"/>
+                <a:satMod val="120000"/>
+              </a:schemeClr>
+            </a:gs>
+          </a:gsLst>
+          <a:lin ang="5400000" scaled="0"/>
+        </a:gradFill>
+      </a:bgFillStyleLst>
+    </a:fmtScheme>
+  </a:themeElements>
+  <a:objectDefaults/>
+  <a:extraClrSchemeLst/>
+  <a:extLst>
+    <a:ext uri="{05A4C25C-085E-4340-85A3-A5531E510DB2}">
+      <thm15:themeFamily xmlns:thm15="http://schemas.microsoft.com/office/thememl/2012/main" name="Office Theme" id="{62F939B6-93AF-4DB8-9C6B-D6C7DFDC589F}" vid="{4A3C46E8-61CC-4603-A589-7422A47A8E4A}"/>
+    </a:ext>
+  </a:extLst>
+</a:theme>
 </file>